--- a/public/lessons/year-6-maths/autumn/week-10/apply-autumn-reasoning/teaching-powerpoint-v1.pptx
+++ b/public/lessons/year-6-maths/autumn/week-10/apply-autumn-reasoning/teaching-powerpoint-v1.pptx
@@ -2,24 +2,24 @@
 <file path=ppt/presentation.xml><?xml version="1.0" encoding="utf-8"?>
 <p:presentation xmlns:p="http://schemas.openxmlformats.org/presentationml/2006/main">
   <p:sldMasterIdLst>
-    <p:sldMasterId xmlns:r="http://schemas.openxmlformats.org/officeDocument/2006/relationships" id="2147483648" r:id="Rc961516149724d75"/>
+    <p:sldMasterId xmlns:r="http://schemas.openxmlformats.org/officeDocument/2006/relationships" id="2147483648" r:id="R3bef623c7cb14bb0"/>
   </p:sldMasterIdLst>
   <p:notesMasterIdLst>
-    <p:notesMasterId xmlns:r="http://schemas.openxmlformats.org/officeDocument/2006/relationships" r:id="R60555f0562fe4d6d"/>
+    <p:notesMasterId xmlns:r="http://schemas.openxmlformats.org/officeDocument/2006/relationships" r:id="R994a8a9c4f734268"/>
   </p:notesMasterIdLst>
   <p:sldIdLst>
-    <p:sldId xmlns:r="http://schemas.openxmlformats.org/officeDocument/2006/relationships" id="256" r:id="R8622a97736374370"/>
-    <p:sldId xmlns:r="http://schemas.openxmlformats.org/officeDocument/2006/relationships" id="257" r:id="R97b7003f88b742f2"/>
-    <p:sldId xmlns:r="http://schemas.openxmlformats.org/officeDocument/2006/relationships" id="258" r:id="R04234c063a424b98"/>
-    <p:sldId xmlns:r="http://schemas.openxmlformats.org/officeDocument/2006/relationships" id="259" r:id="Rac288303a7ae4917"/>
-    <p:sldId xmlns:r="http://schemas.openxmlformats.org/officeDocument/2006/relationships" id="260" r:id="R01afd93874ae41e1"/>
-    <p:sldId xmlns:r="http://schemas.openxmlformats.org/officeDocument/2006/relationships" id="261" r:id="R7178f90aaa384240"/>
-    <p:sldId xmlns:r="http://schemas.openxmlformats.org/officeDocument/2006/relationships" id="262" r:id="R355222a523354baf"/>
-    <p:sldId xmlns:r="http://schemas.openxmlformats.org/officeDocument/2006/relationships" id="263" r:id="Rf87c1fa50f70430e"/>
-    <p:sldId xmlns:r="http://schemas.openxmlformats.org/officeDocument/2006/relationships" id="264" r:id="R0a325395c4e648e4"/>
-    <p:sldId xmlns:r="http://schemas.openxmlformats.org/officeDocument/2006/relationships" id="265" r:id="Rce695169930e4ad6"/>
-    <p:sldId xmlns:r="http://schemas.openxmlformats.org/officeDocument/2006/relationships" id="266" r:id="Rabf5bd925bdb4b4a"/>
-    <p:sldId xmlns:r="http://schemas.openxmlformats.org/officeDocument/2006/relationships" id="267" r:id="Rac3036fe21e34a67"/>
+    <p:sldId xmlns:r="http://schemas.openxmlformats.org/officeDocument/2006/relationships" id="256" r:id="Rec177f26b1e348a8"/>
+    <p:sldId xmlns:r="http://schemas.openxmlformats.org/officeDocument/2006/relationships" id="257" r:id="Rf73b692bc1684b4d"/>
+    <p:sldId xmlns:r="http://schemas.openxmlformats.org/officeDocument/2006/relationships" id="258" r:id="R6683f3b504aa41a0"/>
+    <p:sldId xmlns:r="http://schemas.openxmlformats.org/officeDocument/2006/relationships" id="259" r:id="R1b49aa43dc2d44ab"/>
+    <p:sldId xmlns:r="http://schemas.openxmlformats.org/officeDocument/2006/relationships" id="260" r:id="Re962389123ad4c92"/>
+    <p:sldId xmlns:r="http://schemas.openxmlformats.org/officeDocument/2006/relationships" id="261" r:id="Rb224374334fd4b4b"/>
+    <p:sldId xmlns:r="http://schemas.openxmlformats.org/officeDocument/2006/relationships" id="262" r:id="R479011e176464e2d"/>
+    <p:sldId xmlns:r="http://schemas.openxmlformats.org/officeDocument/2006/relationships" id="263" r:id="R058415b3d69a4f3f"/>
+    <p:sldId xmlns:r="http://schemas.openxmlformats.org/officeDocument/2006/relationships" id="264" r:id="Ra55a9169a22e41f0"/>
+    <p:sldId xmlns:r="http://schemas.openxmlformats.org/officeDocument/2006/relationships" id="265" r:id="R93c4968aa6f74edc"/>
+    <p:sldId xmlns:r="http://schemas.openxmlformats.org/officeDocument/2006/relationships" id="266" r:id="Ra93c41eba45e48a3"/>
+    <p:sldId xmlns:r="http://schemas.openxmlformats.org/officeDocument/2006/relationships" id="267" r:id="Re89cc245b3c94b0d"/>
   </p:sldIdLst>
   <p:sldSz cx="12192000" cy="6858000"/>
   <p:notesSz cx="6858000" cy="9144000"/>
@@ -873,7 +873,7 @@
           <a:lstStyle xmlns:a="http://schemas.openxmlformats.org/drawingml/2006/main"/>
           <a:p xmlns:a="http://schemas.openxmlformats.org/drawingml/2006/main">
             <a:r>
-              <a:t>I do. Reveal the question, setup and each calculation stage one click at a time. Pupils watch before copying. Model answer: 320 books.</a:t>
+              <a:t>I do. Reveal the question, then reveal each mathematical change one click at a time. Point to the numbers and operation that changed before moving to the next line. Final answer: 320 books.</a:t>
             </a:r>
           </a:p>
         </p:txBody>
@@ -1291,7 +1291,7 @@
   </p:cSld>
   <p:clrMap bg1="lt1" tx1="dk1" bg2="lt2" tx2="dk2" accent1="accent1" accent2="accent2" accent3="accent3" accent4="accent4" accent5="accent5" accent6="accent6" hlink="hlink" folHlink="folHlink"/>
   <p:sldLayoutIdLst>
-    <p:sldLayoutId xmlns:r="http://schemas.openxmlformats.org/officeDocument/2006/relationships" id="2147483649" r:id="R7d3e4d44eb804c27"/>
+    <p:sldLayoutId xmlns:r="http://schemas.openxmlformats.org/officeDocument/2006/relationships" id="2147483649" r:id="R17b7fb0583914a45"/>
   </p:sldLayoutIdLst>
   <p:txStyles>
     <p:titleStyle>
@@ -1842,7 +1842,7 @@
           <p:cNvPr id="12" name="">
             <a:extLst xmlns:a="http://schemas.openxmlformats.org/drawingml/2006/main">
               <a:ext uri="{FF2B5EF4-FFF2-40B4-BE49-F238E27FC236}">
-                <a16:creationId xmlns:a16="http://schemas.microsoft.com/office/drawing/2014/main" id="{33BD5EED-58AA-45ED-B07E-334345CE186E}"/>
+                <a16:creationId xmlns:a16="http://schemas.microsoft.com/office/drawing/2014/main" id="{2F1E63B4-0A92-4162-969D-C7D37DF6CFA4}"/>
               </a:ext>
             </a:extLst>
           </p:cNvPr>
@@ -1874,7 +1874,7 @@
           <p:cNvPr id="2" name="">
             <a:extLst xmlns:a="http://schemas.openxmlformats.org/drawingml/2006/main">
               <a:ext uri="{FF2B5EF4-FFF2-40B4-BE49-F238E27FC236}">
-                <a16:creationId xmlns:a16="http://schemas.microsoft.com/office/drawing/2014/main" id="{2A5B7ACB-A851-4DA0-9D8D-AD0B5B25AF18}"/>
+                <a16:creationId xmlns:a16="http://schemas.microsoft.com/office/drawing/2014/main" id="{D70D4BC7-15E6-48DF-A067-9CE123B1E4F2}"/>
               </a:ext>
             </a:extLst>
           </p:cNvPr>
@@ -1931,7 +1931,7 @@
           <p:cNvPr id="3" name="">
             <a:extLst xmlns:a="http://schemas.openxmlformats.org/drawingml/2006/main">
               <a:ext uri="{FF2B5EF4-FFF2-40B4-BE49-F238E27FC236}">
-                <a16:creationId xmlns:a16="http://schemas.microsoft.com/office/drawing/2014/main" id="{99A627D3-543A-46BD-9E7D-6758D811F4BC}"/>
+                <a16:creationId xmlns:a16="http://schemas.microsoft.com/office/drawing/2014/main" id="{1D991FE0-B669-42D5-A9B3-1F425A7E011C}"/>
               </a:ext>
             </a:extLst>
           </p:cNvPr>
@@ -1965,7 +1965,7 @@
           <p:cNvPr id="4" name="">
             <a:extLst xmlns:a="http://schemas.openxmlformats.org/drawingml/2006/main">
               <a:ext uri="{FF2B5EF4-FFF2-40B4-BE49-F238E27FC236}">
-                <a16:creationId xmlns:a16="http://schemas.microsoft.com/office/drawing/2014/main" id="{0A8F8B71-7B2D-4F62-AB0C-474779774341}"/>
+                <a16:creationId xmlns:a16="http://schemas.microsoft.com/office/drawing/2014/main" id="{E2183B45-D136-4FE4-97EF-CC9D464C1DD2}"/>
               </a:ext>
             </a:extLst>
           </p:cNvPr>
@@ -2022,7 +2022,7 @@
           <p:cNvPr id="5" name="">
             <a:extLst xmlns:a="http://schemas.openxmlformats.org/drawingml/2006/main">
               <a:ext uri="{FF2B5EF4-FFF2-40B4-BE49-F238E27FC236}">
-                <a16:creationId xmlns:a16="http://schemas.microsoft.com/office/drawing/2014/main" id="{90373F6A-03E8-43EC-A155-7F5D5A4DF659}"/>
+                <a16:creationId xmlns:a16="http://schemas.microsoft.com/office/drawing/2014/main" id="{145051DE-4BFE-460F-B3D8-D61C45ED49F5}"/>
               </a:ext>
             </a:extLst>
           </p:cNvPr>
@@ -2079,7 +2079,7 @@
           <p:cNvPr id="6" name="">
             <a:extLst xmlns:a="http://schemas.openxmlformats.org/drawingml/2006/main">
               <a:ext uri="{FF2B5EF4-FFF2-40B4-BE49-F238E27FC236}">
-                <a16:creationId xmlns:a16="http://schemas.microsoft.com/office/drawing/2014/main" id="{436B3472-455F-4869-9A2D-3CC3DCA0708E}"/>
+                <a16:creationId xmlns:a16="http://schemas.microsoft.com/office/drawing/2014/main" id="{8F450BB8-7B12-41FE-89EC-32FC7FF5CA7A}"/>
               </a:ext>
             </a:extLst>
           </p:cNvPr>
@@ -2113,7 +2113,7 @@
           <p:cNvPr id="7" name="">
             <a:extLst xmlns:a="http://schemas.openxmlformats.org/drawingml/2006/main">
               <a:ext uri="{FF2B5EF4-FFF2-40B4-BE49-F238E27FC236}">
-                <a16:creationId xmlns:a16="http://schemas.microsoft.com/office/drawing/2014/main" id="{7147509A-C61B-4802-898F-69CE4FEDF17E}"/>
+                <a16:creationId xmlns:a16="http://schemas.microsoft.com/office/drawing/2014/main" id="{D750AC81-6296-4E09-AC81-5D98B0C79DBA}"/>
               </a:ext>
             </a:extLst>
           </p:cNvPr>
@@ -2170,7 +2170,7 @@
           <p:cNvPr id="8" name="">
             <a:extLst xmlns:a="http://schemas.openxmlformats.org/drawingml/2006/main">
               <a:ext uri="{FF2B5EF4-FFF2-40B4-BE49-F238E27FC236}">
-                <a16:creationId xmlns:a16="http://schemas.microsoft.com/office/drawing/2014/main" id="{BFCC075C-6287-4A4D-9058-97653D8FE7FA}"/>
+                <a16:creationId xmlns:a16="http://schemas.microsoft.com/office/drawing/2014/main" id="{722B1C0F-B244-4F27-862C-F15EFD40CEEF}"/>
               </a:ext>
             </a:extLst>
           </p:cNvPr>
@@ -2227,7 +2227,7 @@
           <p:cNvPr id="9" name="">
             <a:extLst xmlns:a="http://schemas.openxmlformats.org/drawingml/2006/main">
               <a:ext uri="{FF2B5EF4-FFF2-40B4-BE49-F238E27FC236}">
-                <a16:creationId xmlns:a16="http://schemas.microsoft.com/office/drawing/2014/main" id="{74F45AB8-FDBD-434F-ADDA-C675AE6F0C03}"/>
+                <a16:creationId xmlns:a16="http://schemas.microsoft.com/office/drawing/2014/main" id="{146D45D8-5DC8-4D86-99A9-DD983E60F664}"/>
               </a:ext>
             </a:extLst>
           </p:cNvPr>
@@ -2284,7 +2284,7 @@
           <p:cNvPr id="10" name="">
             <a:extLst xmlns:a="http://schemas.openxmlformats.org/drawingml/2006/main">
               <a:ext uri="{FF2B5EF4-FFF2-40B4-BE49-F238E27FC236}">
-                <a16:creationId xmlns:a16="http://schemas.microsoft.com/office/drawing/2014/main" id="{0657A749-46B1-4140-A189-8228CA1B75FC}"/>
+                <a16:creationId xmlns:a16="http://schemas.microsoft.com/office/drawing/2014/main" id="{793AD8FF-5F4D-43F0-8FD2-FCAC070A0A29}"/>
               </a:ext>
             </a:extLst>
           </p:cNvPr>
@@ -2341,7 +2341,7 @@
           <p:cNvPr id="11" name="">
             <a:extLst xmlns:a="http://schemas.openxmlformats.org/drawingml/2006/main">
               <a:ext uri="{FF2B5EF4-FFF2-40B4-BE49-F238E27FC236}">
-                <a16:creationId xmlns:a16="http://schemas.microsoft.com/office/drawing/2014/main" id="{D56DA9A0-C033-47CD-8620-792D26B5C688}"/>
+                <a16:creationId xmlns:a16="http://schemas.microsoft.com/office/drawing/2014/main" id="{90F2BE42-2BA0-43F4-8BED-83C840760C35}"/>
               </a:ext>
             </a:extLst>
           </p:cNvPr>
@@ -2396,7 +2396,7 @@
     </p:spTree>
     <p:extLst>
       <p:ext uri="{BB962C8B-B14F-4D97-AF65-F5344CB8AC3E}">
-        <p14:creationId xmlns:p14="http://schemas.microsoft.com/office/powerpoint/2010/main" val="1496128287"/>
+        <p14:creationId xmlns:p14="http://schemas.microsoft.com/office/powerpoint/2010/main" val="1490177950"/>
       </p:ext>
     </p:extLst>
   </p:cSld>
@@ -2427,7 +2427,7 @@
           <p:cNvPr id="14" name="">
             <a:extLst xmlns:a="http://schemas.openxmlformats.org/drawingml/2006/main">
               <a:ext uri="{FF2B5EF4-FFF2-40B4-BE49-F238E27FC236}">
-                <a16:creationId xmlns:a16="http://schemas.microsoft.com/office/drawing/2014/main" id="{7867827E-F77C-4E48-88B5-A4DC2472C372}"/>
+                <a16:creationId xmlns:a16="http://schemas.microsoft.com/office/drawing/2014/main" id="{31FB22AE-D9E3-4A26-9160-1085DA59A357}"/>
               </a:ext>
             </a:extLst>
           </p:cNvPr>
@@ -2459,7 +2459,7 @@
           <p:cNvPr id="2" name="">
             <a:extLst xmlns:a="http://schemas.openxmlformats.org/drawingml/2006/main">
               <a:ext uri="{FF2B5EF4-FFF2-40B4-BE49-F238E27FC236}">
-                <a16:creationId xmlns:a16="http://schemas.microsoft.com/office/drawing/2014/main" id="{97867C1D-57C8-4DDE-9C8C-37892D47F183}"/>
+                <a16:creationId xmlns:a16="http://schemas.microsoft.com/office/drawing/2014/main" id="{C4C98B87-AFD0-4351-A5B3-744ADFC2D86F}"/>
               </a:ext>
             </a:extLst>
           </p:cNvPr>
@@ -2516,7 +2516,7 @@
           <p:cNvPr id="3" name="">
             <a:extLst xmlns:a="http://schemas.openxmlformats.org/drawingml/2006/main">
               <a:ext uri="{FF2B5EF4-FFF2-40B4-BE49-F238E27FC236}">
-                <a16:creationId xmlns:a16="http://schemas.microsoft.com/office/drawing/2014/main" id="{AE8332D8-421E-44B5-9811-D12CA0264FC5}"/>
+                <a16:creationId xmlns:a16="http://schemas.microsoft.com/office/drawing/2014/main" id="{F22C9C33-0E73-4753-AFE7-CD4049341333}"/>
               </a:ext>
             </a:extLst>
           </p:cNvPr>
@@ -2548,7 +2548,7 @@
           <p:cNvPr id="4" name="">
             <a:extLst xmlns:a="http://schemas.openxmlformats.org/drawingml/2006/main">
               <a:ext uri="{FF2B5EF4-FFF2-40B4-BE49-F238E27FC236}">
-                <a16:creationId xmlns:a16="http://schemas.microsoft.com/office/drawing/2014/main" id="{D3273F67-C85E-457B-952B-7461EBEFC14D}"/>
+                <a16:creationId xmlns:a16="http://schemas.microsoft.com/office/drawing/2014/main" id="{37FAAC7E-4D49-4972-B638-3101DB4E04F6}"/>
               </a:ext>
             </a:extLst>
           </p:cNvPr>
@@ -2605,7 +2605,7 @@
           <p:cNvPr id="5" name="">
             <a:extLst xmlns:a="http://schemas.openxmlformats.org/drawingml/2006/main">
               <a:ext uri="{FF2B5EF4-FFF2-40B4-BE49-F238E27FC236}">
-                <a16:creationId xmlns:a16="http://schemas.microsoft.com/office/drawing/2014/main" id="{DB61468D-0453-4556-B808-E16BB44B9B08}"/>
+                <a16:creationId xmlns:a16="http://schemas.microsoft.com/office/drawing/2014/main" id="{EA58E5FD-ACBB-42C8-B9FE-65F50B37E313}"/>
               </a:ext>
             </a:extLst>
           </p:cNvPr>
@@ -2662,7 +2662,7 @@
           <p:cNvPr id="6" name="">
             <a:extLst xmlns:a="http://schemas.openxmlformats.org/drawingml/2006/main">
               <a:ext uri="{FF2B5EF4-FFF2-40B4-BE49-F238E27FC236}">
-                <a16:creationId xmlns:a16="http://schemas.microsoft.com/office/drawing/2014/main" id="{1A7EDC95-1474-4BC4-A04E-952199426DAD}"/>
+                <a16:creationId xmlns:a16="http://schemas.microsoft.com/office/drawing/2014/main" id="{4DFEA881-2C8C-4220-AC56-18A9B1458673}"/>
               </a:ext>
             </a:extLst>
           </p:cNvPr>
@@ -2719,7 +2719,7 @@
           <p:cNvPr id="7" name="">
             <a:extLst xmlns:a="http://schemas.openxmlformats.org/drawingml/2006/main">
               <a:ext uri="{FF2B5EF4-FFF2-40B4-BE49-F238E27FC236}">
-                <a16:creationId xmlns:a16="http://schemas.microsoft.com/office/drawing/2014/main" id="{4E47BDC2-32E4-4D74-902A-3BB3D5151F8E}"/>
+                <a16:creationId xmlns:a16="http://schemas.microsoft.com/office/drawing/2014/main" id="{13D29080-F156-4241-A70F-4A6E53FBC0C4}"/>
               </a:ext>
             </a:extLst>
           </p:cNvPr>
@@ -2751,7 +2751,7 @@
           <p:cNvPr id="8" name="">
             <a:extLst xmlns:a="http://schemas.openxmlformats.org/drawingml/2006/main">
               <a:ext uri="{FF2B5EF4-FFF2-40B4-BE49-F238E27FC236}">
-                <a16:creationId xmlns:a16="http://schemas.microsoft.com/office/drawing/2014/main" id="{30189BA0-073D-4E4E-87E3-F0E1EEA4C382}"/>
+                <a16:creationId xmlns:a16="http://schemas.microsoft.com/office/drawing/2014/main" id="{8808A49B-AE1F-404D-B553-53432436EB6D}"/>
               </a:ext>
             </a:extLst>
           </p:cNvPr>
@@ -2808,7 +2808,7 @@
           <p:cNvPr id="9" name="">
             <a:extLst xmlns:a="http://schemas.openxmlformats.org/drawingml/2006/main">
               <a:ext uri="{FF2B5EF4-FFF2-40B4-BE49-F238E27FC236}">
-                <a16:creationId xmlns:a16="http://schemas.microsoft.com/office/drawing/2014/main" id="{146DA5A4-C2AB-4949-8DD6-C5AB6CEE4CB1}"/>
+                <a16:creationId xmlns:a16="http://schemas.microsoft.com/office/drawing/2014/main" id="{F8C43292-FDB6-424D-B21A-76A86A46E6D2}"/>
               </a:ext>
             </a:extLst>
           </p:cNvPr>
@@ -2865,7 +2865,7 @@
           <p:cNvPr id="10" name="">
             <a:extLst xmlns:a="http://schemas.openxmlformats.org/drawingml/2006/main">
               <a:ext uri="{FF2B5EF4-FFF2-40B4-BE49-F238E27FC236}">
-                <a16:creationId xmlns:a16="http://schemas.microsoft.com/office/drawing/2014/main" id="{DEBA6A82-57D8-4126-B063-5A1F2709DDC2}"/>
+                <a16:creationId xmlns:a16="http://schemas.microsoft.com/office/drawing/2014/main" id="{3A7B7F1D-44EA-4986-8D74-9A9D4FC1413B}"/>
               </a:ext>
             </a:extLst>
           </p:cNvPr>
@@ -2922,7 +2922,7 @@
           <p:cNvPr id="11" name="">
             <a:extLst xmlns:a="http://schemas.openxmlformats.org/drawingml/2006/main">
               <a:ext uri="{FF2B5EF4-FFF2-40B4-BE49-F238E27FC236}">
-                <a16:creationId xmlns:a16="http://schemas.microsoft.com/office/drawing/2014/main" id="{51B548F2-F08D-4740-85FC-B9AE70FBD5C1}"/>
+                <a16:creationId xmlns:a16="http://schemas.microsoft.com/office/drawing/2014/main" id="{997D2A81-1FDF-4674-B21E-6C6AD20228DD}"/>
               </a:ext>
             </a:extLst>
           </p:cNvPr>
@@ -2979,7 +2979,7 @@
           <p:cNvPr id="12" name="">
             <a:extLst xmlns:a="http://schemas.openxmlformats.org/drawingml/2006/main">
               <a:ext uri="{FF2B5EF4-FFF2-40B4-BE49-F238E27FC236}">
-                <a16:creationId xmlns:a16="http://schemas.microsoft.com/office/drawing/2014/main" id="{441592A4-6FC4-404C-82CF-8C3DAF333CE7}"/>
+                <a16:creationId xmlns:a16="http://schemas.microsoft.com/office/drawing/2014/main" id="{BFEFE77E-A66C-435D-A206-DCE5DE3D7E33}"/>
               </a:ext>
             </a:extLst>
           </p:cNvPr>
@@ -3036,7 +3036,7 @@
           <p:cNvPr id="13" name="">
             <a:extLst xmlns:a="http://schemas.openxmlformats.org/drawingml/2006/main">
               <a:ext uri="{FF2B5EF4-FFF2-40B4-BE49-F238E27FC236}">
-                <a16:creationId xmlns:a16="http://schemas.microsoft.com/office/drawing/2014/main" id="{27B20A10-1211-4C6C-B34D-B51B3438DDE2}"/>
+                <a16:creationId xmlns:a16="http://schemas.microsoft.com/office/drawing/2014/main" id="{59053062-E766-4B69-B29B-554B0E67C946}"/>
               </a:ext>
             </a:extLst>
           </p:cNvPr>
@@ -3091,7 +3091,7 @@
     </p:spTree>
     <p:extLst>
       <p:ext uri="{BB962C8B-B14F-4D97-AF65-F5344CB8AC3E}">
-        <p14:creationId xmlns:p14="http://schemas.microsoft.com/office/powerpoint/2010/main" val="271809661"/>
+        <p14:creationId xmlns:p14="http://schemas.microsoft.com/office/powerpoint/2010/main" val="672680919"/>
       </p:ext>
     </p:extLst>
   </p:cSld>
@@ -3292,7 +3292,7 @@
           <p:cNvPr id="19" name="">
             <a:extLst xmlns:a="http://schemas.openxmlformats.org/drawingml/2006/main">
               <a:ext uri="{FF2B5EF4-FFF2-40B4-BE49-F238E27FC236}">
-                <a16:creationId xmlns:a16="http://schemas.microsoft.com/office/drawing/2014/main" id="{85E53CAE-28C0-4955-9087-97640466FB8D}"/>
+                <a16:creationId xmlns:a16="http://schemas.microsoft.com/office/drawing/2014/main" id="{23E3008B-B555-402F-BDE7-E920D780966D}"/>
               </a:ext>
             </a:extLst>
           </p:cNvPr>
@@ -3324,7 +3324,7 @@
           <p:cNvPr id="2" name="">
             <a:extLst xmlns:a="http://schemas.openxmlformats.org/drawingml/2006/main">
               <a:ext uri="{FF2B5EF4-FFF2-40B4-BE49-F238E27FC236}">
-                <a16:creationId xmlns:a16="http://schemas.microsoft.com/office/drawing/2014/main" id="{98FDA60B-C18B-49DA-A7C1-3A94B61DC1E5}"/>
+                <a16:creationId xmlns:a16="http://schemas.microsoft.com/office/drawing/2014/main" id="{31E5094D-D4EC-483E-A1A9-A097274AADD3}"/>
               </a:ext>
             </a:extLst>
           </p:cNvPr>
@@ -3381,7 +3381,7 @@
           <p:cNvPr id="3" name="">
             <a:extLst xmlns:a="http://schemas.openxmlformats.org/drawingml/2006/main">
               <a:ext uri="{FF2B5EF4-FFF2-40B4-BE49-F238E27FC236}">
-                <a16:creationId xmlns:a16="http://schemas.microsoft.com/office/drawing/2014/main" id="{6B42B31D-5798-4ACF-9154-31FFF8267B7A}"/>
+                <a16:creationId xmlns:a16="http://schemas.microsoft.com/office/drawing/2014/main" id="{141E4C21-B5C1-467B-84A5-6D215A7DA7B9}"/>
               </a:ext>
             </a:extLst>
           </p:cNvPr>
@@ -3413,7 +3413,7 @@
           <p:cNvPr id="4" name="">
             <a:extLst xmlns:a="http://schemas.openxmlformats.org/drawingml/2006/main">
               <a:ext uri="{FF2B5EF4-FFF2-40B4-BE49-F238E27FC236}">
-                <a16:creationId xmlns:a16="http://schemas.microsoft.com/office/drawing/2014/main" id="{34738CD7-92BB-486C-935F-AA58C1110958}"/>
+                <a16:creationId xmlns:a16="http://schemas.microsoft.com/office/drawing/2014/main" id="{BD0F9D2D-4AFC-496F-8DF3-9D52C271370E}"/>
               </a:ext>
             </a:extLst>
           </p:cNvPr>
@@ -3470,7 +3470,7 @@
           <p:cNvPr id="5" name="">
             <a:extLst xmlns:a="http://schemas.openxmlformats.org/drawingml/2006/main">
               <a:ext uri="{FF2B5EF4-FFF2-40B4-BE49-F238E27FC236}">
-                <a16:creationId xmlns:a16="http://schemas.microsoft.com/office/drawing/2014/main" id="{D2D8D5D0-C83C-4B9E-BF8C-D1A8D39D1468}"/>
+                <a16:creationId xmlns:a16="http://schemas.microsoft.com/office/drawing/2014/main" id="{483F3B0E-3EB7-4356-BF31-0FDE2D5A62CD}"/>
               </a:ext>
             </a:extLst>
           </p:cNvPr>
@@ -3527,7 +3527,7 @@
           <p:cNvPr id="6" name="">
             <a:extLst xmlns:a="http://schemas.openxmlformats.org/drawingml/2006/main">
               <a:ext uri="{FF2B5EF4-FFF2-40B4-BE49-F238E27FC236}">
-                <a16:creationId xmlns:a16="http://schemas.microsoft.com/office/drawing/2014/main" id="{F6581CF8-38FF-4076-8C8D-748A908ECF1E}"/>
+                <a16:creationId xmlns:a16="http://schemas.microsoft.com/office/drawing/2014/main" id="{EC9BDC30-3C56-4F57-A4B9-CC3777F56F25}"/>
               </a:ext>
             </a:extLst>
           </p:cNvPr>
@@ -3584,7 +3584,7 @@
           <p:cNvPr id="7" name="">
             <a:extLst xmlns:a="http://schemas.openxmlformats.org/drawingml/2006/main">
               <a:ext uri="{FF2B5EF4-FFF2-40B4-BE49-F238E27FC236}">
-                <a16:creationId xmlns:a16="http://schemas.microsoft.com/office/drawing/2014/main" id="{4061A20B-43B4-464F-B92D-47519AD8C639}"/>
+                <a16:creationId xmlns:a16="http://schemas.microsoft.com/office/drawing/2014/main" id="{29D950F6-7E5F-4C2B-8280-97AC020A8107}"/>
               </a:ext>
             </a:extLst>
           </p:cNvPr>
@@ -3616,7 +3616,7 @@
           <p:cNvPr id="8" name="">
             <a:extLst xmlns:a="http://schemas.openxmlformats.org/drawingml/2006/main">
               <a:ext uri="{FF2B5EF4-FFF2-40B4-BE49-F238E27FC236}">
-                <a16:creationId xmlns:a16="http://schemas.microsoft.com/office/drawing/2014/main" id="{110F88BA-B4F9-4CFA-B6BF-9D378BC951DC}"/>
+                <a16:creationId xmlns:a16="http://schemas.microsoft.com/office/drawing/2014/main" id="{125180CB-86C4-49B9-B6A5-7C37BBAB5937}"/>
               </a:ext>
             </a:extLst>
           </p:cNvPr>
@@ -3673,7 +3673,7 @@
           <p:cNvPr id="9" name="">
             <a:extLst xmlns:a="http://schemas.openxmlformats.org/drawingml/2006/main">
               <a:ext uri="{FF2B5EF4-FFF2-40B4-BE49-F238E27FC236}">
-                <a16:creationId xmlns:a16="http://schemas.microsoft.com/office/drawing/2014/main" id="{298204E8-E97D-44C2-80A4-224E43156787}"/>
+                <a16:creationId xmlns:a16="http://schemas.microsoft.com/office/drawing/2014/main" id="{22F1BA44-E556-4C99-B6C6-50074DF8938B}"/>
               </a:ext>
             </a:extLst>
           </p:cNvPr>
@@ -3730,7 +3730,7 @@
           <p:cNvPr id="10" name="">
             <a:extLst xmlns:a="http://schemas.openxmlformats.org/drawingml/2006/main">
               <a:ext uri="{FF2B5EF4-FFF2-40B4-BE49-F238E27FC236}">
-                <a16:creationId xmlns:a16="http://schemas.microsoft.com/office/drawing/2014/main" id="{78B3A5DC-5487-4D9E-951F-98385064E357}"/>
+                <a16:creationId xmlns:a16="http://schemas.microsoft.com/office/drawing/2014/main" id="{B9E45302-CC48-40CF-AED4-6878D2BBB6EE}"/>
               </a:ext>
             </a:extLst>
           </p:cNvPr>
@@ -3787,7 +3787,7 @@
           <p:cNvPr id="11" name="">
             <a:extLst xmlns:a="http://schemas.openxmlformats.org/drawingml/2006/main">
               <a:ext uri="{FF2B5EF4-FFF2-40B4-BE49-F238E27FC236}">
-                <a16:creationId xmlns:a16="http://schemas.microsoft.com/office/drawing/2014/main" id="{CD3BB8E0-0950-4AC9-8C20-7B564CD93F49}"/>
+                <a16:creationId xmlns:a16="http://schemas.microsoft.com/office/drawing/2014/main" id="{CF828C6C-0391-4F1C-B3C9-55C67F9771E9}"/>
               </a:ext>
             </a:extLst>
           </p:cNvPr>
@@ -3821,7 +3821,7 @@
           <p:cNvPr id="12" name="">
             <a:extLst xmlns:a="http://schemas.openxmlformats.org/drawingml/2006/main">
               <a:ext uri="{FF2B5EF4-FFF2-40B4-BE49-F238E27FC236}">
-                <a16:creationId xmlns:a16="http://schemas.microsoft.com/office/drawing/2014/main" id="{0297E770-9914-4FE5-9E35-E36435C43255}"/>
+                <a16:creationId xmlns:a16="http://schemas.microsoft.com/office/drawing/2014/main" id="{887F7F0B-220C-4F59-AED3-65B555A8D701}"/>
               </a:ext>
             </a:extLst>
           </p:cNvPr>
@@ -3878,7 +3878,7 @@
           <p:cNvPr id="13" name="">
             <a:extLst xmlns:a="http://schemas.openxmlformats.org/drawingml/2006/main">
               <a:ext uri="{FF2B5EF4-FFF2-40B4-BE49-F238E27FC236}">
-                <a16:creationId xmlns:a16="http://schemas.microsoft.com/office/drawing/2014/main" id="{6E120065-9538-4CB6-BBFB-07DD2B8523F1}"/>
+                <a16:creationId xmlns:a16="http://schemas.microsoft.com/office/drawing/2014/main" id="{D4D8B043-572D-4E20-9D39-A9467688CEB8}"/>
               </a:ext>
             </a:extLst>
           </p:cNvPr>
@@ -3935,7 +3935,7 @@
           <p:cNvPr id="14" name="">
             <a:extLst xmlns:a="http://schemas.openxmlformats.org/drawingml/2006/main">
               <a:ext uri="{FF2B5EF4-FFF2-40B4-BE49-F238E27FC236}">
-                <a16:creationId xmlns:a16="http://schemas.microsoft.com/office/drawing/2014/main" id="{40DB605D-BC30-4C27-8604-3307F0B55992}"/>
+                <a16:creationId xmlns:a16="http://schemas.microsoft.com/office/drawing/2014/main" id="{F595504A-4D4E-4A78-9FC0-7398BA5645A5}"/>
               </a:ext>
             </a:extLst>
           </p:cNvPr>
@@ -3992,7 +3992,7 @@
           <p:cNvPr id="15" name="">
             <a:extLst xmlns:a="http://schemas.openxmlformats.org/drawingml/2006/main">
               <a:ext uri="{FF2B5EF4-FFF2-40B4-BE49-F238E27FC236}">
-                <a16:creationId xmlns:a16="http://schemas.microsoft.com/office/drawing/2014/main" id="{03B31751-150C-4034-9B64-42B13B15AC07}"/>
+                <a16:creationId xmlns:a16="http://schemas.microsoft.com/office/drawing/2014/main" id="{B27E5774-442D-4C18-9662-7965279D905C}"/>
               </a:ext>
             </a:extLst>
           </p:cNvPr>
@@ -4026,7 +4026,7 @@
           <p:cNvPr id="16" name="">
             <a:extLst xmlns:a="http://schemas.openxmlformats.org/drawingml/2006/main">
               <a:ext uri="{FF2B5EF4-FFF2-40B4-BE49-F238E27FC236}">
-                <a16:creationId xmlns:a16="http://schemas.microsoft.com/office/drawing/2014/main" id="{0E24A051-C360-4263-AA91-8C60917E48F1}"/>
+                <a16:creationId xmlns:a16="http://schemas.microsoft.com/office/drawing/2014/main" id="{1153EB41-8B6C-4B1E-9CA6-0FE7E8C484FB}"/>
               </a:ext>
             </a:extLst>
           </p:cNvPr>
@@ -4083,7 +4083,7 @@
           <p:cNvPr id="17" name="">
             <a:extLst xmlns:a="http://schemas.openxmlformats.org/drawingml/2006/main">
               <a:ext uri="{FF2B5EF4-FFF2-40B4-BE49-F238E27FC236}">
-                <a16:creationId xmlns:a16="http://schemas.microsoft.com/office/drawing/2014/main" id="{A4C8D035-485F-462F-BDEB-8C1664A9548E}"/>
+                <a16:creationId xmlns:a16="http://schemas.microsoft.com/office/drawing/2014/main" id="{FB8A3498-EFEB-425C-898B-DD92BC176140}"/>
               </a:ext>
             </a:extLst>
           </p:cNvPr>
@@ -4140,7 +4140,7 @@
           <p:cNvPr id="18" name="">
             <a:extLst xmlns:a="http://schemas.openxmlformats.org/drawingml/2006/main">
               <a:ext uri="{FF2B5EF4-FFF2-40B4-BE49-F238E27FC236}">
-                <a16:creationId xmlns:a16="http://schemas.microsoft.com/office/drawing/2014/main" id="{47873D72-8406-4ECE-B6F9-07822522EDD4}"/>
+                <a16:creationId xmlns:a16="http://schemas.microsoft.com/office/drawing/2014/main" id="{8BFCA1AE-87F4-44E0-A471-78D9838878A4}"/>
               </a:ext>
             </a:extLst>
           </p:cNvPr>
@@ -4195,7 +4195,7 @@
     </p:spTree>
     <p:extLst>
       <p:ext uri="{BB962C8B-B14F-4D97-AF65-F5344CB8AC3E}">
-        <p14:creationId xmlns:p14="http://schemas.microsoft.com/office/powerpoint/2010/main" val="1696993404"/>
+        <p14:creationId xmlns:p14="http://schemas.microsoft.com/office/powerpoint/2010/main" val="61444500"/>
       </p:ext>
     </p:extLst>
   </p:cSld>
@@ -4350,7 +4350,7 @@
           <p:cNvPr id="23" name="">
             <a:extLst xmlns:a="http://schemas.openxmlformats.org/drawingml/2006/main">
               <a:ext uri="{FF2B5EF4-FFF2-40B4-BE49-F238E27FC236}">
-                <a16:creationId xmlns:a16="http://schemas.microsoft.com/office/drawing/2014/main" id="{0CDEA4E2-D8CB-4D0C-B48D-BA279021F890}"/>
+                <a16:creationId xmlns:a16="http://schemas.microsoft.com/office/drawing/2014/main" id="{ADC09D26-9026-4FAF-92CF-9613B21F4DA9}"/>
               </a:ext>
             </a:extLst>
           </p:cNvPr>
@@ -4382,7 +4382,7 @@
           <p:cNvPr id="2" name="">
             <a:extLst xmlns:a="http://schemas.openxmlformats.org/drawingml/2006/main">
               <a:ext uri="{FF2B5EF4-FFF2-40B4-BE49-F238E27FC236}">
-                <a16:creationId xmlns:a16="http://schemas.microsoft.com/office/drawing/2014/main" id="{C52ADBBA-F768-4E7F-AD1E-D3869393D3F6}"/>
+                <a16:creationId xmlns:a16="http://schemas.microsoft.com/office/drawing/2014/main" id="{9B8BADD6-D6F4-4655-946E-005420C96246}"/>
               </a:ext>
             </a:extLst>
           </p:cNvPr>
@@ -4439,7 +4439,7 @@
           <p:cNvPr id="3" name="">
             <a:extLst xmlns:a="http://schemas.openxmlformats.org/drawingml/2006/main">
               <a:ext uri="{FF2B5EF4-FFF2-40B4-BE49-F238E27FC236}">
-                <a16:creationId xmlns:a16="http://schemas.microsoft.com/office/drawing/2014/main" id="{88196E8D-1823-410A-8DF6-81CF2A75CAA6}"/>
+                <a16:creationId xmlns:a16="http://schemas.microsoft.com/office/drawing/2014/main" id="{1034B5AA-A5EA-4EBF-AF0F-7F68AD2171F1}"/>
               </a:ext>
             </a:extLst>
           </p:cNvPr>
@@ -4471,7 +4471,7 @@
           <p:cNvPr id="4" name="">
             <a:extLst xmlns:a="http://schemas.openxmlformats.org/drawingml/2006/main">
               <a:ext uri="{FF2B5EF4-FFF2-40B4-BE49-F238E27FC236}">
-                <a16:creationId xmlns:a16="http://schemas.microsoft.com/office/drawing/2014/main" id="{44217EC2-81E9-46CA-9B8C-B69BC6EB5C68}"/>
+                <a16:creationId xmlns:a16="http://schemas.microsoft.com/office/drawing/2014/main" id="{528B625D-C374-49E6-BAA1-B695B430B433}"/>
               </a:ext>
             </a:extLst>
           </p:cNvPr>
@@ -4528,7 +4528,7 @@
           <p:cNvPr id="5" name="">
             <a:extLst xmlns:a="http://schemas.openxmlformats.org/drawingml/2006/main">
               <a:ext uri="{FF2B5EF4-FFF2-40B4-BE49-F238E27FC236}">
-                <a16:creationId xmlns:a16="http://schemas.microsoft.com/office/drawing/2014/main" id="{A2FD0912-E763-41F5-9D8B-A0F5D638B8BD}"/>
+                <a16:creationId xmlns:a16="http://schemas.microsoft.com/office/drawing/2014/main" id="{97F62EC3-97F1-47BD-B15D-D04B67FC4A4C}"/>
               </a:ext>
             </a:extLst>
           </p:cNvPr>
@@ -4585,7 +4585,7 @@
           <p:cNvPr id="6" name="">
             <a:extLst xmlns:a="http://schemas.openxmlformats.org/drawingml/2006/main">
               <a:ext uri="{FF2B5EF4-FFF2-40B4-BE49-F238E27FC236}">
-                <a16:creationId xmlns:a16="http://schemas.microsoft.com/office/drawing/2014/main" id="{EA5FF7A9-5C2D-40D3-86CE-8F165A032390}"/>
+                <a16:creationId xmlns:a16="http://schemas.microsoft.com/office/drawing/2014/main" id="{6EA2893E-A013-4F16-8DEE-D954008DA88F}"/>
               </a:ext>
             </a:extLst>
           </p:cNvPr>
@@ -4642,7 +4642,7 @@
           <p:cNvPr id="7" name="">
             <a:extLst xmlns:a="http://schemas.openxmlformats.org/drawingml/2006/main">
               <a:ext uri="{FF2B5EF4-FFF2-40B4-BE49-F238E27FC236}">
-                <a16:creationId xmlns:a16="http://schemas.microsoft.com/office/drawing/2014/main" id="{09562232-7CE1-4ADA-8957-A3FF63845D1C}"/>
+                <a16:creationId xmlns:a16="http://schemas.microsoft.com/office/drawing/2014/main" id="{CD7F8025-F5F5-4E49-9AF2-C3CE5BA77CF3}"/>
               </a:ext>
             </a:extLst>
           </p:cNvPr>
@@ -4674,7 +4674,7 @@
           <p:cNvPr id="8" name="">
             <a:extLst xmlns:a="http://schemas.openxmlformats.org/drawingml/2006/main">
               <a:ext uri="{FF2B5EF4-FFF2-40B4-BE49-F238E27FC236}">
-                <a16:creationId xmlns:a16="http://schemas.microsoft.com/office/drawing/2014/main" id="{975BA37E-0230-4AAD-86FA-5317D60A6232}"/>
+                <a16:creationId xmlns:a16="http://schemas.microsoft.com/office/drawing/2014/main" id="{087072E4-C6C5-4EF6-8485-FEF77A7BDE6E}"/>
               </a:ext>
             </a:extLst>
           </p:cNvPr>
@@ -4731,7 +4731,7 @@
           <p:cNvPr id="9" name="">
             <a:extLst xmlns:a="http://schemas.openxmlformats.org/drawingml/2006/main">
               <a:ext uri="{FF2B5EF4-FFF2-40B4-BE49-F238E27FC236}">
-                <a16:creationId xmlns:a16="http://schemas.microsoft.com/office/drawing/2014/main" id="{70CB6C89-FC23-441D-A279-BC940AC8C04E}"/>
+                <a16:creationId xmlns:a16="http://schemas.microsoft.com/office/drawing/2014/main" id="{04BBBCEE-AA1C-4604-943E-75A8CA06785C}"/>
               </a:ext>
             </a:extLst>
           </p:cNvPr>
@@ -4788,7 +4788,7 @@
           <p:cNvPr id="10" name="">
             <a:extLst xmlns:a="http://schemas.openxmlformats.org/drawingml/2006/main">
               <a:ext uri="{FF2B5EF4-FFF2-40B4-BE49-F238E27FC236}">
-                <a16:creationId xmlns:a16="http://schemas.microsoft.com/office/drawing/2014/main" id="{728568A6-A0D3-4778-A618-853CE4A16807}"/>
+                <a16:creationId xmlns:a16="http://schemas.microsoft.com/office/drawing/2014/main" id="{360B4B90-5FA1-4313-B005-B2BF4A713058}"/>
               </a:ext>
             </a:extLst>
           </p:cNvPr>
@@ -4822,7 +4822,7 @@
           <p:cNvPr id="11" name="">
             <a:extLst xmlns:a="http://schemas.openxmlformats.org/drawingml/2006/main">
               <a:ext uri="{FF2B5EF4-FFF2-40B4-BE49-F238E27FC236}">
-                <a16:creationId xmlns:a16="http://schemas.microsoft.com/office/drawing/2014/main" id="{45E8335F-23CD-4E17-BAC4-0B1B62414BD6}"/>
+                <a16:creationId xmlns:a16="http://schemas.microsoft.com/office/drawing/2014/main" id="{9FA227D7-8485-495B-A482-30ECDAD05513}"/>
               </a:ext>
             </a:extLst>
           </p:cNvPr>
@@ -4854,7 +4854,7 @@
           <p:cNvPr id="12" name="">
             <a:extLst xmlns:a="http://schemas.openxmlformats.org/drawingml/2006/main">
               <a:ext uri="{FF2B5EF4-FFF2-40B4-BE49-F238E27FC236}">
-                <a16:creationId xmlns:a16="http://schemas.microsoft.com/office/drawing/2014/main" id="{4B0C519F-7B8D-4398-8ADC-E33704ADA747}"/>
+                <a16:creationId xmlns:a16="http://schemas.microsoft.com/office/drawing/2014/main" id="{E60FEFF3-3BCB-4B6F-9B2E-45EF687968C3}"/>
               </a:ext>
             </a:extLst>
           </p:cNvPr>
@@ -4911,7 +4911,7 @@
           <p:cNvPr id="13" name="">
             <a:extLst xmlns:a="http://schemas.openxmlformats.org/drawingml/2006/main">
               <a:ext uri="{FF2B5EF4-FFF2-40B4-BE49-F238E27FC236}">
-                <a16:creationId xmlns:a16="http://schemas.microsoft.com/office/drawing/2014/main" id="{228A6BE4-C358-4D1C-ACC6-85E5E18D79C6}"/>
+                <a16:creationId xmlns:a16="http://schemas.microsoft.com/office/drawing/2014/main" id="{220EE4DE-B809-48C1-8EAA-A6F138AEA632}"/>
               </a:ext>
             </a:extLst>
           </p:cNvPr>
@@ -4968,7 +4968,7 @@
           <p:cNvPr id="14" name="">
             <a:extLst xmlns:a="http://schemas.openxmlformats.org/drawingml/2006/main">
               <a:ext uri="{FF2B5EF4-FFF2-40B4-BE49-F238E27FC236}">
-                <a16:creationId xmlns:a16="http://schemas.microsoft.com/office/drawing/2014/main" id="{03446174-C7B2-425D-8043-80921051241D}"/>
+                <a16:creationId xmlns:a16="http://schemas.microsoft.com/office/drawing/2014/main" id="{D23B524C-ABEF-47DC-85EA-A702ED91DCC1}"/>
               </a:ext>
             </a:extLst>
           </p:cNvPr>
@@ -5002,7 +5002,7 @@
           <p:cNvPr id="15" name="">
             <a:extLst xmlns:a="http://schemas.openxmlformats.org/drawingml/2006/main">
               <a:ext uri="{FF2B5EF4-FFF2-40B4-BE49-F238E27FC236}">
-                <a16:creationId xmlns:a16="http://schemas.microsoft.com/office/drawing/2014/main" id="{DEE6FC6B-70DE-40FC-B142-BD773F02BC7A}"/>
+                <a16:creationId xmlns:a16="http://schemas.microsoft.com/office/drawing/2014/main" id="{86A63CB9-57D6-4D79-8C1A-40FBB71394C1}"/>
               </a:ext>
             </a:extLst>
           </p:cNvPr>
@@ -5034,7 +5034,7 @@
           <p:cNvPr id="16" name="">
             <a:extLst xmlns:a="http://schemas.openxmlformats.org/drawingml/2006/main">
               <a:ext uri="{FF2B5EF4-FFF2-40B4-BE49-F238E27FC236}">
-                <a16:creationId xmlns:a16="http://schemas.microsoft.com/office/drawing/2014/main" id="{1B710DC6-5827-4AAF-8357-315D55A9AC2A}"/>
+                <a16:creationId xmlns:a16="http://schemas.microsoft.com/office/drawing/2014/main" id="{453C4748-544A-4779-B8A0-29FC1F4113E8}"/>
               </a:ext>
             </a:extLst>
           </p:cNvPr>
@@ -5091,7 +5091,7 @@
           <p:cNvPr id="17" name="">
             <a:extLst xmlns:a="http://schemas.openxmlformats.org/drawingml/2006/main">
               <a:ext uri="{FF2B5EF4-FFF2-40B4-BE49-F238E27FC236}">
-                <a16:creationId xmlns:a16="http://schemas.microsoft.com/office/drawing/2014/main" id="{75607068-0321-404B-A565-7A6D3B41F324}"/>
+                <a16:creationId xmlns:a16="http://schemas.microsoft.com/office/drawing/2014/main" id="{3BBF6514-DE3C-4281-B18E-35EBB365FC81}"/>
               </a:ext>
             </a:extLst>
           </p:cNvPr>
@@ -5148,7 +5148,7 @@
           <p:cNvPr id="18" name="">
             <a:extLst xmlns:a="http://schemas.openxmlformats.org/drawingml/2006/main">
               <a:ext uri="{FF2B5EF4-FFF2-40B4-BE49-F238E27FC236}">
-                <a16:creationId xmlns:a16="http://schemas.microsoft.com/office/drawing/2014/main" id="{2BBE9F16-D852-47F3-9412-015F5A22A62B}"/>
+                <a16:creationId xmlns:a16="http://schemas.microsoft.com/office/drawing/2014/main" id="{9B50B036-82E5-4798-920A-2FA997CF4674}"/>
               </a:ext>
             </a:extLst>
           </p:cNvPr>
@@ -5182,7 +5182,7 @@
           <p:cNvPr id="19" name="">
             <a:extLst xmlns:a="http://schemas.openxmlformats.org/drawingml/2006/main">
               <a:ext uri="{FF2B5EF4-FFF2-40B4-BE49-F238E27FC236}">
-                <a16:creationId xmlns:a16="http://schemas.microsoft.com/office/drawing/2014/main" id="{3B42B956-78B8-4CD9-B3E0-2E6C003D42AF}"/>
+                <a16:creationId xmlns:a16="http://schemas.microsoft.com/office/drawing/2014/main" id="{E8719D48-536C-40FC-972F-53C3B6719E67}"/>
               </a:ext>
             </a:extLst>
           </p:cNvPr>
@@ -5214,7 +5214,7 @@
           <p:cNvPr id="20" name="">
             <a:extLst xmlns:a="http://schemas.openxmlformats.org/drawingml/2006/main">
               <a:ext uri="{FF2B5EF4-FFF2-40B4-BE49-F238E27FC236}">
-                <a16:creationId xmlns:a16="http://schemas.microsoft.com/office/drawing/2014/main" id="{BD9E340F-BD99-470B-B978-D6457AC36087}"/>
+                <a16:creationId xmlns:a16="http://schemas.microsoft.com/office/drawing/2014/main" id="{CC8F2BBC-4306-4B89-91FB-50459A7783F1}"/>
               </a:ext>
             </a:extLst>
           </p:cNvPr>
@@ -5271,7 +5271,7 @@
           <p:cNvPr id="21" name="">
             <a:extLst xmlns:a="http://schemas.openxmlformats.org/drawingml/2006/main">
               <a:ext uri="{FF2B5EF4-FFF2-40B4-BE49-F238E27FC236}">
-                <a16:creationId xmlns:a16="http://schemas.microsoft.com/office/drawing/2014/main" id="{71631085-ECEF-4EE4-AF83-201E97A687A9}"/>
+                <a16:creationId xmlns:a16="http://schemas.microsoft.com/office/drawing/2014/main" id="{9D9F64E0-F3F6-4BC7-A2BD-BC633B758F00}"/>
               </a:ext>
             </a:extLst>
           </p:cNvPr>
@@ -5328,7 +5328,7 @@
           <p:cNvPr id="22" name="">
             <a:extLst xmlns:a="http://schemas.openxmlformats.org/drawingml/2006/main">
               <a:ext uri="{FF2B5EF4-FFF2-40B4-BE49-F238E27FC236}">
-                <a16:creationId xmlns:a16="http://schemas.microsoft.com/office/drawing/2014/main" id="{1D662460-5DB7-4838-ACAA-4F599B2B121E}"/>
+                <a16:creationId xmlns:a16="http://schemas.microsoft.com/office/drawing/2014/main" id="{EF1CA8E9-CBE2-42CB-9E7A-111C4BAA1BFE}"/>
               </a:ext>
             </a:extLst>
           </p:cNvPr>
@@ -5383,7 +5383,7 @@
     </p:spTree>
     <p:extLst>
       <p:ext uri="{BB962C8B-B14F-4D97-AF65-F5344CB8AC3E}">
-        <p14:creationId xmlns:p14="http://schemas.microsoft.com/office/powerpoint/2010/main" val="699935161"/>
+        <p14:creationId xmlns:p14="http://schemas.microsoft.com/office/powerpoint/2010/main" val="319799921"/>
       </p:ext>
     </p:extLst>
   </p:cSld>
@@ -5584,7 +5584,7 @@
           <p:cNvPr id="23" name="">
             <a:extLst xmlns:a="http://schemas.openxmlformats.org/drawingml/2006/main">
               <a:ext uri="{FF2B5EF4-FFF2-40B4-BE49-F238E27FC236}">
-                <a16:creationId xmlns:a16="http://schemas.microsoft.com/office/drawing/2014/main" id="{5AAD2BA8-7450-43A5-AE39-549BCB8C4804}"/>
+                <a16:creationId xmlns:a16="http://schemas.microsoft.com/office/drawing/2014/main" id="{87DFD9CF-818B-4C44-8AB8-C1D6AAB0461B}"/>
               </a:ext>
             </a:extLst>
           </p:cNvPr>
@@ -5616,7 +5616,7 @@
           <p:cNvPr id="2" name="">
             <a:extLst xmlns:a="http://schemas.openxmlformats.org/drawingml/2006/main">
               <a:ext uri="{FF2B5EF4-FFF2-40B4-BE49-F238E27FC236}">
-                <a16:creationId xmlns:a16="http://schemas.microsoft.com/office/drawing/2014/main" id="{51E49046-33D9-4B26-A7C0-DF654BA57F0C}"/>
+                <a16:creationId xmlns:a16="http://schemas.microsoft.com/office/drawing/2014/main" id="{D2D5947E-BC89-4235-9CC5-D78563367285}"/>
               </a:ext>
             </a:extLst>
           </p:cNvPr>
@@ -5673,7 +5673,7 @@
           <p:cNvPr id="3" name="">
             <a:extLst xmlns:a="http://schemas.openxmlformats.org/drawingml/2006/main">
               <a:ext uri="{FF2B5EF4-FFF2-40B4-BE49-F238E27FC236}">
-                <a16:creationId xmlns:a16="http://schemas.microsoft.com/office/drawing/2014/main" id="{5FE417B1-C121-4C47-831A-ECDCAD6A0E65}"/>
+                <a16:creationId xmlns:a16="http://schemas.microsoft.com/office/drawing/2014/main" id="{954E23FA-CB90-427B-9C72-BE8B71C4E552}"/>
               </a:ext>
             </a:extLst>
           </p:cNvPr>
@@ -5705,7 +5705,7 @@
           <p:cNvPr id="4" name="">
             <a:extLst xmlns:a="http://schemas.openxmlformats.org/drawingml/2006/main">
               <a:ext uri="{FF2B5EF4-FFF2-40B4-BE49-F238E27FC236}">
-                <a16:creationId xmlns:a16="http://schemas.microsoft.com/office/drawing/2014/main" id="{B511FE4D-206A-48FC-ABAF-826F7B0F63C2}"/>
+                <a16:creationId xmlns:a16="http://schemas.microsoft.com/office/drawing/2014/main" id="{FD1F39CE-4C8B-4037-8810-42279FC8BBCF}"/>
               </a:ext>
             </a:extLst>
           </p:cNvPr>
@@ -5762,7 +5762,7 @@
           <p:cNvPr id="5" name="">
             <a:extLst xmlns:a="http://schemas.openxmlformats.org/drawingml/2006/main">
               <a:ext uri="{FF2B5EF4-FFF2-40B4-BE49-F238E27FC236}">
-                <a16:creationId xmlns:a16="http://schemas.microsoft.com/office/drawing/2014/main" id="{3A61E112-E232-46D5-983B-455482C43362}"/>
+                <a16:creationId xmlns:a16="http://schemas.microsoft.com/office/drawing/2014/main" id="{53C9E730-6B8D-4881-9045-61E3AE790DEC}"/>
               </a:ext>
             </a:extLst>
           </p:cNvPr>
@@ -5819,7 +5819,7 @@
           <p:cNvPr id="6" name="">
             <a:extLst xmlns:a="http://schemas.openxmlformats.org/drawingml/2006/main">
               <a:ext uri="{FF2B5EF4-FFF2-40B4-BE49-F238E27FC236}">
-                <a16:creationId xmlns:a16="http://schemas.microsoft.com/office/drawing/2014/main" id="{341BA46F-C7DD-4597-A8BE-D316F8298B4E}"/>
+                <a16:creationId xmlns:a16="http://schemas.microsoft.com/office/drawing/2014/main" id="{8A9A2303-D7DE-4122-BF93-3C88885F9B7D}"/>
               </a:ext>
             </a:extLst>
           </p:cNvPr>
@@ -5876,7 +5876,7 @@
           <p:cNvPr id="7" name="">
             <a:extLst xmlns:a="http://schemas.openxmlformats.org/drawingml/2006/main">
               <a:ext uri="{FF2B5EF4-FFF2-40B4-BE49-F238E27FC236}">
-                <a16:creationId xmlns:a16="http://schemas.microsoft.com/office/drawing/2014/main" id="{9A8AB720-D3AD-4DE8-B13B-904650419D7E}"/>
+                <a16:creationId xmlns:a16="http://schemas.microsoft.com/office/drawing/2014/main" id="{A983B3E8-1369-4B0A-8594-776114BB30D6}"/>
               </a:ext>
             </a:extLst>
           </p:cNvPr>
@@ -5908,7 +5908,7 @@
           <p:cNvPr id="8" name="">
             <a:extLst xmlns:a="http://schemas.openxmlformats.org/drawingml/2006/main">
               <a:ext uri="{FF2B5EF4-FFF2-40B4-BE49-F238E27FC236}">
-                <a16:creationId xmlns:a16="http://schemas.microsoft.com/office/drawing/2014/main" id="{8E09E9B5-6F31-4C23-933D-C6483F33F6AB}"/>
+                <a16:creationId xmlns:a16="http://schemas.microsoft.com/office/drawing/2014/main" id="{FC4B2A51-87DA-453D-B19F-9B8A751C37C0}"/>
               </a:ext>
             </a:extLst>
           </p:cNvPr>
@@ -5965,7 +5965,7 @@
           <p:cNvPr id="9" name="">
             <a:extLst xmlns:a="http://schemas.openxmlformats.org/drawingml/2006/main">
               <a:ext uri="{FF2B5EF4-FFF2-40B4-BE49-F238E27FC236}">
-                <a16:creationId xmlns:a16="http://schemas.microsoft.com/office/drawing/2014/main" id="{E8B57C52-E14B-45F9-8F37-DDA4999AF075}"/>
+                <a16:creationId xmlns:a16="http://schemas.microsoft.com/office/drawing/2014/main" id="{944CC2B3-1A57-44B6-8EC8-D612A85C8C6E}"/>
               </a:ext>
             </a:extLst>
           </p:cNvPr>
@@ -6022,7 +6022,7 @@
           <p:cNvPr id="10" name="">
             <a:extLst xmlns:a="http://schemas.openxmlformats.org/drawingml/2006/main">
               <a:ext uri="{FF2B5EF4-FFF2-40B4-BE49-F238E27FC236}">
-                <a16:creationId xmlns:a16="http://schemas.microsoft.com/office/drawing/2014/main" id="{11207E9A-8AF0-431F-82AF-6FF50330D310}"/>
+                <a16:creationId xmlns:a16="http://schemas.microsoft.com/office/drawing/2014/main" id="{C54D5369-4476-4E31-A4A5-B11F0E072AB7}"/>
               </a:ext>
             </a:extLst>
           </p:cNvPr>
@@ -6056,7 +6056,7 @@
           <p:cNvPr id="11" name="">
             <a:extLst xmlns:a="http://schemas.openxmlformats.org/drawingml/2006/main">
               <a:ext uri="{FF2B5EF4-FFF2-40B4-BE49-F238E27FC236}">
-                <a16:creationId xmlns:a16="http://schemas.microsoft.com/office/drawing/2014/main" id="{204D63CB-925B-4DA9-8630-B57478BB3822}"/>
+                <a16:creationId xmlns:a16="http://schemas.microsoft.com/office/drawing/2014/main" id="{CF04BCCB-1770-4AD5-9831-0C7DC6F6D5B1}"/>
               </a:ext>
             </a:extLst>
           </p:cNvPr>
@@ -6088,7 +6088,7 @@
           <p:cNvPr id="12" name="">
             <a:extLst xmlns:a="http://schemas.openxmlformats.org/drawingml/2006/main">
               <a:ext uri="{FF2B5EF4-FFF2-40B4-BE49-F238E27FC236}">
-                <a16:creationId xmlns:a16="http://schemas.microsoft.com/office/drawing/2014/main" id="{5B90A5B9-C606-444F-943F-194FA4A200CD}"/>
+                <a16:creationId xmlns:a16="http://schemas.microsoft.com/office/drawing/2014/main" id="{5574A27D-7F15-4EC1-AF57-5F57B4AF1D61}"/>
               </a:ext>
             </a:extLst>
           </p:cNvPr>
@@ -6145,7 +6145,7 @@
           <p:cNvPr id="13" name="">
             <a:extLst xmlns:a="http://schemas.openxmlformats.org/drawingml/2006/main">
               <a:ext uri="{FF2B5EF4-FFF2-40B4-BE49-F238E27FC236}">
-                <a16:creationId xmlns:a16="http://schemas.microsoft.com/office/drawing/2014/main" id="{9EF6B5C5-6C2F-4B37-B13B-270F940D32D3}"/>
+                <a16:creationId xmlns:a16="http://schemas.microsoft.com/office/drawing/2014/main" id="{00F119F8-3134-4729-A051-C706E8F3BFE4}"/>
               </a:ext>
             </a:extLst>
           </p:cNvPr>
@@ -6202,7 +6202,7 @@
           <p:cNvPr id="14" name="">
             <a:extLst xmlns:a="http://schemas.openxmlformats.org/drawingml/2006/main">
               <a:ext uri="{FF2B5EF4-FFF2-40B4-BE49-F238E27FC236}">
-                <a16:creationId xmlns:a16="http://schemas.microsoft.com/office/drawing/2014/main" id="{F95A9731-4DBB-4B22-9EF9-EF75DFEBC876}"/>
+                <a16:creationId xmlns:a16="http://schemas.microsoft.com/office/drawing/2014/main" id="{021BF7C4-B6CA-43FA-BAFC-62A2F808BDB5}"/>
               </a:ext>
             </a:extLst>
           </p:cNvPr>
@@ -6236,7 +6236,7 @@
           <p:cNvPr id="15" name="">
             <a:extLst xmlns:a="http://schemas.openxmlformats.org/drawingml/2006/main">
               <a:ext uri="{FF2B5EF4-FFF2-40B4-BE49-F238E27FC236}">
-                <a16:creationId xmlns:a16="http://schemas.microsoft.com/office/drawing/2014/main" id="{9386D481-8C83-499E-BE97-4682C99A1EC0}"/>
+                <a16:creationId xmlns:a16="http://schemas.microsoft.com/office/drawing/2014/main" id="{3E5712AE-921D-43DE-A5D8-CBA9A7E2995D}"/>
               </a:ext>
             </a:extLst>
           </p:cNvPr>
@@ -6268,7 +6268,7 @@
           <p:cNvPr id="16" name="">
             <a:extLst xmlns:a="http://schemas.openxmlformats.org/drawingml/2006/main">
               <a:ext uri="{FF2B5EF4-FFF2-40B4-BE49-F238E27FC236}">
-                <a16:creationId xmlns:a16="http://schemas.microsoft.com/office/drawing/2014/main" id="{A254395E-A216-48E6-8AF4-C1701FB8A432}"/>
+                <a16:creationId xmlns:a16="http://schemas.microsoft.com/office/drawing/2014/main" id="{910AFECD-250D-4734-B6FD-7882BF0E41E2}"/>
               </a:ext>
             </a:extLst>
           </p:cNvPr>
@@ -6325,7 +6325,7 @@
           <p:cNvPr id="17" name="">
             <a:extLst xmlns:a="http://schemas.openxmlformats.org/drawingml/2006/main">
               <a:ext uri="{FF2B5EF4-FFF2-40B4-BE49-F238E27FC236}">
-                <a16:creationId xmlns:a16="http://schemas.microsoft.com/office/drawing/2014/main" id="{EBBD1F1E-F814-49F7-AB5D-8AFA6CAE6777}"/>
+                <a16:creationId xmlns:a16="http://schemas.microsoft.com/office/drawing/2014/main" id="{8B2B7A44-D040-4033-9EAD-60A48CE2722B}"/>
               </a:ext>
             </a:extLst>
           </p:cNvPr>
@@ -6382,7 +6382,7 @@
           <p:cNvPr id="18" name="">
             <a:extLst xmlns:a="http://schemas.openxmlformats.org/drawingml/2006/main">
               <a:ext uri="{FF2B5EF4-FFF2-40B4-BE49-F238E27FC236}">
-                <a16:creationId xmlns:a16="http://schemas.microsoft.com/office/drawing/2014/main" id="{0ED472A5-7CA7-411E-B031-EC311CB8EF84}"/>
+                <a16:creationId xmlns:a16="http://schemas.microsoft.com/office/drawing/2014/main" id="{729390FD-F3DE-4C74-8904-786CB5F4E5BD}"/>
               </a:ext>
             </a:extLst>
           </p:cNvPr>
@@ -6416,7 +6416,7 @@
           <p:cNvPr id="19" name="">
             <a:extLst xmlns:a="http://schemas.openxmlformats.org/drawingml/2006/main">
               <a:ext uri="{FF2B5EF4-FFF2-40B4-BE49-F238E27FC236}">
-                <a16:creationId xmlns:a16="http://schemas.microsoft.com/office/drawing/2014/main" id="{9C2F4F49-B989-4C7B-9927-D850F9CE012B}"/>
+                <a16:creationId xmlns:a16="http://schemas.microsoft.com/office/drawing/2014/main" id="{6BFC6E42-4285-4191-8C35-775D2B27E0E3}"/>
               </a:ext>
             </a:extLst>
           </p:cNvPr>
@@ -6448,7 +6448,7 @@
           <p:cNvPr id="20" name="">
             <a:extLst xmlns:a="http://schemas.openxmlformats.org/drawingml/2006/main">
               <a:ext uri="{FF2B5EF4-FFF2-40B4-BE49-F238E27FC236}">
-                <a16:creationId xmlns:a16="http://schemas.microsoft.com/office/drawing/2014/main" id="{F181805D-BFC5-4D62-BDA7-776E4C419740}"/>
+                <a16:creationId xmlns:a16="http://schemas.microsoft.com/office/drawing/2014/main" id="{147CDF60-5B53-4254-9B4A-D25CD4BE8FA5}"/>
               </a:ext>
             </a:extLst>
           </p:cNvPr>
@@ -6505,7 +6505,7 @@
           <p:cNvPr id="21" name="">
             <a:extLst xmlns:a="http://schemas.openxmlformats.org/drawingml/2006/main">
               <a:ext uri="{FF2B5EF4-FFF2-40B4-BE49-F238E27FC236}">
-                <a16:creationId xmlns:a16="http://schemas.microsoft.com/office/drawing/2014/main" id="{F1975091-C8A0-4EEF-AC07-4A659887D69A}"/>
+                <a16:creationId xmlns:a16="http://schemas.microsoft.com/office/drawing/2014/main" id="{C2C92888-1D99-4978-A945-DE859A92D967}"/>
               </a:ext>
             </a:extLst>
           </p:cNvPr>
@@ -6562,7 +6562,7 @@
           <p:cNvPr id="22" name="">
             <a:extLst xmlns:a="http://schemas.openxmlformats.org/drawingml/2006/main">
               <a:ext uri="{FF2B5EF4-FFF2-40B4-BE49-F238E27FC236}">
-                <a16:creationId xmlns:a16="http://schemas.microsoft.com/office/drawing/2014/main" id="{0C6D1D31-3E27-4399-878A-CACABD9D5B7D}"/>
+                <a16:creationId xmlns:a16="http://schemas.microsoft.com/office/drawing/2014/main" id="{6FB55DB8-567E-4502-8893-A0721654C0B6}"/>
               </a:ext>
             </a:extLst>
           </p:cNvPr>
@@ -6617,7 +6617,7 @@
     </p:spTree>
     <p:extLst>
       <p:ext uri="{BB962C8B-B14F-4D97-AF65-F5344CB8AC3E}">
-        <p14:creationId xmlns:p14="http://schemas.microsoft.com/office/powerpoint/2010/main" val="1656789332"/>
+        <p14:creationId xmlns:p14="http://schemas.microsoft.com/office/powerpoint/2010/main" val="712282914"/>
       </p:ext>
     </p:extLst>
   </p:cSld>
@@ -6818,7 +6818,7 @@
           <p:cNvPr id="16" name="">
             <a:extLst xmlns:a="http://schemas.openxmlformats.org/drawingml/2006/main">
               <a:ext uri="{FF2B5EF4-FFF2-40B4-BE49-F238E27FC236}">
-                <a16:creationId xmlns:a16="http://schemas.microsoft.com/office/drawing/2014/main" id="{B4D2A871-4222-4045-86E1-A8356E0DCCF0}"/>
+                <a16:creationId xmlns:a16="http://schemas.microsoft.com/office/drawing/2014/main" id="{EEB96E68-3F2C-4B13-95A9-1195FFA45971}"/>
               </a:ext>
             </a:extLst>
           </p:cNvPr>
@@ -6850,7 +6850,7 @@
           <p:cNvPr id="2" name="">
             <a:extLst xmlns:a="http://schemas.openxmlformats.org/drawingml/2006/main">
               <a:ext uri="{FF2B5EF4-FFF2-40B4-BE49-F238E27FC236}">
-                <a16:creationId xmlns:a16="http://schemas.microsoft.com/office/drawing/2014/main" id="{E4D6ECDB-DB39-47DD-9184-91754889DD23}"/>
+                <a16:creationId xmlns:a16="http://schemas.microsoft.com/office/drawing/2014/main" id="{21C162CC-E104-4975-BA36-DB931A3DAEFF}"/>
               </a:ext>
             </a:extLst>
           </p:cNvPr>
@@ -6907,7 +6907,7 @@
           <p:cNvPr id="3" name="">
             <a:extLst xmlns:a="http://schemas.openxmlformats.org/drawingml/2006/main">
               <a:ext uri="{FF2B5EF4-FFF2-40B4-BE49-F238E27FC236}">
-                <a16:creationId xmlns:a16="http://schemas.microsoft.com/office/drawing/2014/main" id="{8056DCE0-60EE-4633-8906-6C01F4387BEA}"/>
+                <a16:creationId xmlns:a16="http://schemas.microsoft.com/office/drawing/2014/main" id="{DFBD139D-77E9-4BFE-9BD1-EBD5B71D9C5C}"/>
               </a:ext>
             </a:extLst>
           </p:cNvPr>
@@ -6939,7 +6939,7 @@
           <p:cNvPr id="4" name="">
             <a:extLst xmlns:a="http://schemas.openxmlformats.org/drawingml/2006/main">
               <a:ext uri="{FF2B5EF4-FFF2-40B4-BE49-F238E27FC236}">
-                <a16:creationId xmlns:a16="http://schemas.microsoft.com/office/drawing/2014/main" id="{90B4B45A-A4C9-4327-8ECF-9B16BC179E00}"/>
+                <a16:creationId xmlns:a16="http://schemas.microsoft.com/office/drawing/2014/main" id="{EAC78268-E8D9-4C3D-A21A-C4F28C4ECAE0}"/>
               </a:ext>
             </a:extLst>
           </p:cNvPr>
@@ -6996,7 +6996,7 @@
           <p:cNvPr id="5" name="">
             <a:extLst xmlns:a="http://schemas.openxmlformats.org/drawingml/2006/main">
               <a:ext uri="{FF2B5EF4-FFF2-40B4-BE49-F238E27FC236}">
-                <a16:creationId xmlns:a16="http://schemas.microsoft.com/office/drawing/2014/main" id="{599C46FD-8759-4525-BA9C-0D10939C72B5}"/>
+                <a16:creationId xmlns:a16="http://schemas.microsoft.com/office/drawing/2014/main" id="{4FC102AC-B024-497F-9FD8-D30BA41E600F}"/>
               </a:ext>
             </a:extLst>
           </p:cNvPr>
@@ -7053,7 +7053,7 @@
           <p:cNvPr id="6" name="">
             <a:extLst xmlns:a="http://schemas.openxmlformats.org/drawingml/2006/main">
               <a:ext uri="{FF2B5EF4-FFF2-40B4-BE49-F238E27FC236}">
-                <a16:creationId xmlns:a16="http://schemas.microsoft.com/office/drawing/2014/main" id="{5AF8FEC3-0BEB-4C43-88FD-9F42BAC6192B}"/>
+                <a16:creationId xmlns:a16="http://schemas.microsoft.com/office/drawing/2014/main" id="{CF55D700-B1DA-4025-88DE-6BBE32DF7FA2}"/>
               </a:ext>
             </a:extLst>
           </p:cNvPr>
@@ -7110,7 +7110,7 @@
           <p:cNvPr id="7" name="">
             <a:extLst xmlns:a="http://schemas.openxmlformats.org/drawingml/2006/main">
               <a:ext uri="{FF2B5EF4-FFF2-40B4-BE49-F238E27FC236}">
-                <a16:creationId xmlns:a16="http://schemas.microsoft.com/office/drawing/2014/main" id="{B1DA9752-4B81-44DE-9A34-BD5E7411BA28}"/>
+                <a16:creationId xmlns:a16="http://schemas.microsoft.com/office/drawing/2014/main" id="{19F5122D-1C15-4AC9-BB81-AB6BC74581EB}"/>
               </a:ext>
             </a:extLst>
           </p:cNvPr>
@@ -7142,7 +7142,7 @@
           <p:cNvPr id="8" name="">
             <a:extLst xmlns:a="http://schemas.openxmlformats.org/drawingml/2006/main">
               <a:ext uri="{FF2B5EF4-FFF2-40B4-BE49-F238E27FC236}">
-                <a16:creationId xmlns:a16="http://schemas.microsoft.com/office/drawing/2014/main" id="{146C16E5-44D9-4FBD-9D16-E1FB6C36F212}"/>
+                <a16:creationId xmlns:a16="http://schemas.microsoft.com/office/drawing/2014/main" id="{A37736B3-6A6A-44A8-9DCA-50EB96E5D7B3}"/>
               </a:ext>
             </a:extLst>
           </p:cNvPr>
@@ -7199,7 +7199,7 @@
           <p:cNvPr id="9" name="">
             <a:extLst xmlns:a="http://schemas.openxmlformats.org/drawingml/2006/main">
               <a:ext uri="{FF2B5EF4-FFF2-40B4-BE49-F238E27FC236}">
-                <a16:creationId xmlns:a16="http://schemas.microsoft.com/office/drawing/2014/main" id="{3F6B6AA6-9B32-4F90-982D-1E29A440CA2A}"/>
+                <a16:creationId xmlns:a16="http://schemas.microsoft.com/office/drawing/2014/main" id="{883ABC95-5FFA-4680-84A3-1C5255AD30D8}"/>
               </a:ext>
             </a:extLst>
           </p:cNvPr>
@@ -7256,7 +7256,7 @@
           <p:cNvPr id="10" name="">
             <a:extLst xmlns:a="http://schemas.openxmlformats.org/drawingml/2006/main">
               <a:ext uri="{FF2B5EF4-FFF2-40B4-BE49-F238E27FC236}">
-                <a16:creationId xmlns:a16="http://schemas.microsoft.com/office/drawing/2014/main" id="{2E1B870F-D2E6-44C0-955C-0D3781C20E7A}"/>
+                <a16:creationId xmlns:a16="http://schemas.microsoft.com/office/drawing/2014/main" id="{93B92FAC-1564-4B0C-BF17-F2998E0B052D}"/>
               </a:ext>
             </a:extLst>
           </p:cNvPr>
@@ -7313,7 +7313,7 @@
           <p:cNvPr id="11" name="">
             <a:extLst xmlns:a="http://schemas.openxmlformats.org/drawingml/2006/main">
               <a:ext uri="{FF2B5EF4-FFF2-40B4-BE49-F238E27FC236}">
-                <a16:creationId xmlns:a16="http://schemas.microsoft.com/office/drawing/2014/main" id="{2A6A9E82-6823-4337-A186-741B05B2E1C0}"/>
+                <a16:creationId xmlns:a16="http://schemas.microsoft.com/office/drawing/2014/main" id="{A477D1F5-0C89-4A82-823A-2503464FACB9}"/>
               </a:ext>
             </a:extLst>
           </p:cNvPr>
@@ -7345,7 +7345,7 @@
           <p:cNvPr id="12" name="">
             <a:extLst xmlns:a="http://schemas.openxmlformats.org/drawingml/2006/main">
               <a:ext uri="{FF2B5EF4-FFF2-40B4-BE49-F238E27FC236}">
-                <a16:creationId xmlns:a16="http://schemas.microsoft.com/office/drawing/2014/main" id="{BD957825-5721-4C65-A020-50AD3F408739}"/>
+                <a16:creationId xmlns:a16="http://schemas.microsoft.com/office/drawing/2014/main" id="{3B1E839F-5D3B-4DD6-83A1-05FC44890286}"/>
               </a:ext>
             </a:extLst>
           </p:cNvPr>
@@ -7402,7 +7402,7 @@
           <p:cNvPr id="13" name="">
             <a:extLst xmlns:a="http://schemas.openxmlformats.org/drawingml/2006/main">
               <a:ext uri="{FF2B5EF4-FFF2-40B4-BE49-F238E27FC236}">
-                <a16:creationId xmlns:a16="http://schemas.microsoft.com/office/drawing/2014/main" id="{DBCAF3D6-4CEC-4D0E-AEEB-213A3726F5F7}"/>
+                <a16:creationId xmlns:a16="http://schemas.microsoft.com/office/drawing/2014/main" id="{D44B9CEE-E32A-4CB1-BCCC-9C53009AAE98}"/>
               </a:ext>
             </a:extLst>
           </p:cNvPr>
@@ -7459,7 +7459,7 @@
           <p:cNvPr id="14" name="">
             <a:extLst xmlns:a="http://schemas.openxmlformats.org/drawingml/2006/main">
               <a:ext uri="{FF2B5EF4-FFF2-40B4-BE49-F238E27FC236}">
-                <a16:creationId xmlns:a16="http://schemas.microsoft.com/office/drawing/2014/main" id="{40BFE906-63D7-4C8F-942C-9DE407BF0E71}"/>
+                <a16:creationId xmlns:a16="http://schemas.microsoft.com/office/drawing/2014/main" id="{4F6D02B2-1FDF-49DD-AB29-578324E0E445}"/>
               </a:ext>
             </a:extLst>
           </p:cNvPr>
@@ -7516,7 +7516,7 @@
           <p:cNvPr id="15" name="">
             <a:extLst xmlns:a="http://schemas.openxmlformats.org/drawingml/2006/main">
               <a:ext uri="{FF2B5EF4-FFF2-40B4-BE49-F238E27FC236}">
-                <a16:creationId xmlns:a16="http://schemas.microsoft.com/office/drawing/2014/main" id="{EBBF5941-BB55-4B77-8BA0-461871007CEA}"/>
+                <a16:creationId xmlns:a16="http://schemas.microsoft.com/office/drawing/2014/main" id="{5316FC09-B4A5-4A15-924D-822C198EFEA5}"/>
               </a:ext>
             </a:extLst>
           </p:cNvPr>
@@ -7571,7 +7571,7 @@
     </p:spTree>
     <p:extLst>
       <p:ext uri="{BB962C8B-B14F-4D97-AF65-F5344CB8AC3E}">
-        <p14:creationId xmlns:p14="http://schemas.microsoft.com/office/powerpoint/2010/main" val="323500881"/>
+        <p14:creationId xmlns:p14="http://schemas.microsoft.com/office/powerpoint/2010/main" val="449215184"/>
       </p:ext>
     </p:extLst>
   </p:cSld>
@@ -7772,7 +7772,7 @@
           <p:cNvPr id="23" name="">
             <a:extLst xmlns:a="http://schemas.openxmlformats.org/drawingml/2006/main">
               <a:ext uri="{FF2B5EF4-FFF2-40B4-BE49-F238E27FC236}">
-                <a16:creationId xmlns:a16="http://schemas.microsoft.com/office/drawing/2014/main" id="{7F68FAAF-7F09-43E7-B2A1-C829700D69FA}"/>
+                <a16:creationId xmlns:a16="http://schemas.microsoft.com/office/drawing/2014/main" id="{C5657275-6683-4233-ACC5-CD65E90A11F9}"/>
               </a:ext>
             </a:extLst>
           </p:cNvPr>
@@ -7804,7 +7804,7 @@
           <p:cNvPr id="2" name="">
             <a:extLst xmlns:a="http://schemas.openxmlformats.org/drawingml/2006/main">
               <a:ext uri="{FF2B5EF4-FFF2-40B4-BE49-F238E27FC236}">
-                <a16:creationId xmlns:a16="http://schemas.microsoft.com/office/drawing/2014/main" id="{1DF6EFD9-CD5B-4654-8C98-84442B4181D0}"/>
+                <a16:creationId xmlns:a16="http://schemas.microsoft.com/office/drawing/2014/main" id="{8B030F3A-6CA1-4101-AF0E-74E9863A406C}"/>
               </a:ext>
             </a:extLst>
           </p:cNvPr>
@@ -7861,7 +7861,7 @@
           <p:cNvPr id="3" name="">
             <a:extLst xmlns:a="http://schemas.openxmlformats.org/drawingml/2006/main">
               <a:ext uri="{FF2B5EF4-FFF2-40B4-BE49-F238E27FC236}">
-                <a16:creationId xmlns:a16="http://schemas.microsoft.com/office/drawing/2014/main" id="{33918E03-BF19-4210-BAA0-877771C1A876}"/>
+                <a16:creationId xmlns:a16="http://schemas.microsoft.com/office/drawing/2014/main" id="{8FC32D56-D978-4103-9C3F-74A9C6C4E9FC}"/>
               </a:ext>
             </a:extLst>
           </p:cNvPr>
@@ -7893,7 +7893,7 @@
           <p:cNvPr id="4" name="">
             <a:extLst xmlns:a="http://schemas.openxmlformats.org/drawingml/2006/main">
               <a:ext uri="{FF2B5EF4-FFF2-40B4-BE49-F238E27FC236}">
-                <a16:creationId xmlns:a16="http://schemas.microsoft.com/office/drawing/2014/main" id="{708E0C3E-7F10-4C04-9FCB-CFAEE30281E7}"/>
+                <a16:creationId xmlns:a16="http://schemas.microsoft.com/office/drawing/2014/main" id="{E6411249-A75A-4EE1-B470-196C2281F9C9}"/>
               </a:ext>
             </a:extLst>
           </p:cNvPr>
@@ -7950,7 +7950,7 @@
           <p:cNvPr id="5" name="">
             <a:extLst xmlns:a="http://schemas.openxmlformats.org/drawingml/2006/main">
               <a:ext uri="{FF2B5EF4-FFF2-40B4-BE49-F238E27FC236}">
-                <a16:creationId xmlns:a16="http://schemas.microsoft.com/office/drawing/2014/main" id="{07499711-342C-4223-A278-05116C9BF84D}"/>
+                <a16:creationId xmlns:a16="http://schemas.microsoft.com/office/drawing/2014/main" id="{078D49CC-4ACE-4502-99D5-398874D46006}"/>
               </a:ext>
             </a:extLst>
           </p:cNvPr>
@@ -8007,7 +8007,7 @@
           <p:cNvPr id="6" name="">
             <a:extLst xmlns:a="http://schemas.openxmlformats.org/drawingml/2006/main">
               <a:ext uri="{FF2B5EF4-FFF2-40B4-BE49-F238E27FC236}">
-                <a16:creationId xmlns:a16="http://schemas.microsoft.com/office/drawing/2014/main" id="{3E8F23D7-21CC-4166-B03C-75EC1524E5C5}"/>
+                <a16:creationId xmlns:a16="http://schemas.microsoft.com/office/drawing/2014/main" id="{708899F3-AA30-43F5-A7E1-B46E0ACD6659}"/>
               </a:ext>
             </a:extLst>
           </p:cNvPr>
@@ -8064,7 +8064,7 @@
           <p:cNvPr id="7" name="">
             <a:extLst xmlns:a="http://schemas.openxmlformats.org/drawingml/2006/main">
               <a:ext uri="{FF2B5EF4-FFF2-40B4-BE49-F238E27FC236}">
-                <a16:creationId xmlns:a16="http://schemas.microsoft.com/office/drawing/2014/main" id="{AB807688-8C37-4207-A369-FA14B4BB438E}"/>
+                <a16:creationId xmlns:a16="http://schemas.microsoft.com/office/drawing/2014/main" id="{ECAFC3FB-16EB-49AD-9539-2F918B068C0B}"/>
               </a:ext>
             </a:extLst>
           </p:cNvPr>
@@ -8096,7 +8096,7 @@
           <p:cNvPr id="8" name="">
             <a:extLst xmlns:a="http://schemas.openxmlformats.org/drawingml/2006/main">
               <a:ext uri="{FF2B5EF4-FFF2-40B4-BE49-F238E27FC236}">
-                <a16:creationId xmlns:a16="http://schemas.microsoft.com/office/drawing/2014/main" id="{9B979D97-67B1-4D46-8FA2-04F86FD4D6F3}"/>
+                <a16:creationId xmlns:a16="http://schemas.microsoft.com/office/drawing/2014/main" id="{07C6E233-1262-4126-BC55-B61C23DDC695}"/>
               </a:ext>
             </a:extLst>
           </p:cNvPr>
@@ -8153,7 +8153,7 @@
           <p:cNvPr id="9" name="">
             <a:extLst xmlns:a="http://schemas.openxmlformats.org/drawingml/2006/main">
               <a:ext uri="{FF2B5EF4-FFF2-40B4-BE49-F238E27FC236}">
-                <a16:creationId xmlns:a16="http://schemas.microsoft.com/office/drawing/2014/main" id="{CED91087-328C-4318-B121-E991C2DADC1C}"/>
+                <a16:creationId xmlns:a16="http://schemas.microsoft.com/office/drawing/2014/main" id="{A92D776F-CD24-41B4-B0E2-3E3637DDE15A}"/>
               </a:ext>
             </a:extLst>
           </p:cNvPr>
@@ -8210,19 +8210,19 @@
           <p:cNvPr id="10" name="">
             <a:extLst xmlns:a="http://schemas.openxmlformats.org/drawingml/2006/main">
               <a:ext uri="{FF2B5EF4-FFF2-40B4-BE49-F238E27FC236}">
-                <a16:creationId xmlns:a16="http://schemas.microsoft.com/office/drawing/2014/main" id="{3DBFD041-89F2-4FEB-861D-53B85B011041}"/>
-              </a:ext>
-            </a:extLst>
-          </p:cNvPr>
-          <p:cNvSpPr>
-            <a:spLocks xmlns:a="http://schemas.openxmlformats.org/drawingml/2006/main" noGrp="1"/>
-          </p:cNvSpPr>
-          <p:nvPr/>
-        </p:nvSpPr>
-        <p:spPr>
-          <a:xfrm xmlns:a="http://schemas.openxmlformats.org/drawingml/2006/main">
-            <a:off x="914400" y="1257300"/>
-            <a:ext cx="10363200" cy="781050"/>
+                <a16:creationId xmlns:a16="http://schemas.microsoft.com/office/drawing/2014/main" id="{8B9031E5-935D-4FE9-B9A0-6E38AEEAB8B5}"/>
+              </a:ext>
+            </a:extLst>
+          </p:cNvPr>
+          <p:cNvSpPr>
+            <a:spLocks xmlns:a="http://schemas.openxmlformats.org/drawingml/2006/main" noGrp="1"/>
+          </p:cNvSpPr>
+          <p:nvPr/>
+        </p:nvSpPr>
+        <p:spPr>
+          <a:xfrm xmlns:a="http://schemas.openxmlformats.org/drawingml/2006/main">
+            <a:off x="857250" y="1219200"/>
+            <a:ext cx="10477500" cy="742950"/>
           </a:xfrm>
           <a:prstGeom xmlns:a="http://schemas.openxmlformats.org/drawingml/2006/main" prst="rect">
             <a:avLst/>
@@ -8239,7 +8239,7 @@
           <a:lstStyle xmlns:a="http://schemas.openxmlformats.org/drawingml/2006/main"/>
           <a:p xmlns:a="http://schemas.openxmlformats.org/drawingml/2006/main">
             <a:pPr algn="ctr">
-              <a:defRPr sz="2175" b="1">
+              <a:defRPr sz="2100" b="1">
                 <a:solidFill>
                   <a:srgbClr val="17253A"/>
                 </a:solidFill>
@@ -8249,7 +8249,7 @@
               </a:defRPr>
             </a:pPr>
             <a:r>
-              <a:rPr sz="2175" b="1">
+              <a:rPr sz="2100" b="1">
                 <a:solidFill>
                   <a:srgbClr val="17253A"/>
                 </a:solidFill>
@@ -8267,28 +8267,30 @@
           <p:cNvPr id="11" name="">
             <a:extLst xmlns:a="http://schemas.openxmlformats.org/drawingml/2006/main">
               <a:ext uri="{FF2B5EF4-FFF2-40B4-BE49-F238E27FC236}">
-                <a16:creationId xmlns:a16="http://schemas.microsoft.com/office/drawing/2014/main" id="{1C5B1EA9-AAFB-4FFE-86CC-FBBAB2188BFE}"/>
-              </a:ext>
-            </a:extLst>
-          </p:cNvPr>
-          <p:cNvSpPr>
-            <a:spLocks xmlns:a="http://schemas.openxmlformats.org/drawingml/2006/main" noGrp="1"/>
-          </p:cNvSpPr>
-          <p:nvPr/>
-        </p:nvSpPr>
-        <p:spPr>
-          <a:xfrm xmlns:a="http://schemas.openxmlformats.org/drawingml/2006/main">
-            <a:off x="1000125" y="2247900"/>
-            <a:ext cx="476250" cy="476250"/>
-          </a:xfrm>
-          <a:prstGeom xmlns:a="http://schemas.openxmlformats.org/drawingml/2006/main" prst="ellipse">
+                <a16:creationId xmlns:a16="http://schemas.microsoft.com/office/drawing/2014/main" id="{E28279FB-17D8-44A0-B190-39E9A3EF985A}"/>
+              </a:ext>
+            </a:extLst>
+          </p:cNvPr>
+          <p:cNvSpPr>
+            <a:spLocks xmlns:a="http://schemas.openxmlformats.org/drawingml/2006/main" noGrp="1"/>
+          </p:cNvSpPr>
+          <p:nvPr/>
+        </p:nvSpPr>
+        <p:spPr>
+          <a:xfrm xmlns:a="http://schemas.openxmlformats.org/drawingml/2006/main">
+            <a:off x="971550" y="2124075"/>
+            <a:ext cx="38100" cy="3524250"/>
+          </a:xfrm>
+          <a:prstGeom xmlns:a="http://schemas.openxmlformats.org/drawingml/2006/main" prst="rect">
             <a:avLst/>
           </a:prstGeom>
           <a:solidFill xmlns:a="http://schemas.openxmlformats.org/drawingml/2006/main">
-            <a:srgbClr val="18324A"/>
+            <a:srgbClr val="2C6E73"/>
           </a:solidFill>
           <a:ln xmlns:a="http://schemas.openxmlformats.org/drawingml/2006/main" w="0">
-            <a:noFill/>
+            <a:solidFill>
+              <a:srgbClr val="2C6E73"/>
+            </a:solidFill>
           </a:ln>
         </p:spPr>
       </p:sp>
@@ -8297,19 +8299,19 @@
           <p:cNvPr id="12" name="">
             <a:extLst xmlns:a="http://schemas.openxmlformats.org/drawingml/2006/main">
               <a:ext uri="{FF2B5EF4-FFF2-40B4-BE49-F238E27FC236}">
-                <a16:creationId xmlns:a16="http://schemas.microsoft.com/office/drawing/2014/main" id="{4BE15316-FD86-4B6C-9673-86FFCFBEC904}"/>
-              </a:ext>
-            </a:extLst>
-          </p:cNvPr>
-          <p:cNvSpPr>
-            <a:spLocks xmlns:a="http://schemas.openxmlformats.org/drawingml/2006/main" noGrp="1"/>
-          </p:cNvSpPr>
-          <p:nvPr/>
-        </p:nvSpPr>
-        <p:spPr>
-          <a:xfrm xmlns:a="http://schemas.openxmlformats.org/drawingml/2006/main">
-            <a:off x="1000125" y="2276475"/>
-            <a:ext cx="476250" cy="419100"/>
+                <a16:creationId xmlns:a16="http://schemas.microsoft.com/office/drawing/2014/main" id="{819BD683-BE0C-4136-84F0-0569EB5BB83B}"/>
+              </a:ext>
+            </a:extLst>
+          </p:cNvPr>
+          <p:cNvSpPr>
+            <a:spLocks xmlns:a="http://schemas.openxmlformats.org/drawingml/2006/main" noGrp="1"/>
+          </p:cNvSpPr>
+          <p:nvPr/>
+        </p:nvSpPr>
+        <p:spPr>
+          <a:xfrm xmlns:a="http://schemas.openxmlformats.org/drawingml/2006/main">
+            <a:off x="1162050" y="2200275"/>
+            <a:ext cx="400050" cy="400050"/>
           </a:xfrm>
           <a:prstGeom xmlns:a="http://schemas.openxmlformats.org/drawingml/2006/main" prst="rect">
             <a:avLst/>
@@ -8326,9 +8328,9 @@
           <a:lstStyle xmlns:a="http://schemas.openxmlformats.org/drawingml/2006/main"/>
           <a:p xmlns:a="http://schemas.openxmlformats.org/drawingml/2006/main">
             <a:pPr algn="ctr">
-              <a:defRPr sz="1350" b="1">
-                <a:solidFill>
-                  <a:srgbClr val="FFFFFF"/>
+              <a:defRPr sz="1125" b="1">
+                <a:solidFill>
+                  <a:srgbClr val="2C6E73"/>
                 </a:solidFill>
                 <a:latin typeface="Arial"/>
                 <a:ea typeface="Arial"/>
@@ -8336,9 +8338,9 @@
               </a:defRPr>
             </a:pPr>
             <a:r>
-              <a:rPr sz="1350" b="1">
-                <a:solidFill>
-                  <a:srgbClr val="FFFFFF"/>
+              <a:rPr sz="1125" b="1">
+                <a:solidFill>
+                  <a:srgbClr val="2C6E73"/>
                 </a:solidFill>
                 <a:latin typeface="Arial"/>
                 <a:ea typeface="Arial"/>
@@ -8354,19 +8356,19 @@
           <p:cNvPr id="13" name="">
             <a:extLst xmlns:a="http://schemas.openxmlformats.org/drawingml/2006/main">
               <a:ext uri="{FF2B5EF4-FFF2-40B4-BE49-F238E27FC236}">
-                <a16:creationId xmlns:a16="http://schemas.microsoft.com/office/drawing/2014/main" id="{FF4EB060-568B-4944-A282-89B7F2D973B7}"/>
-              </a:ext>
-            </a:extLst>
-          </p:cNvPr>
-          <p:cNvSpPr>
-            <a:spLocks xmlns:a="http://schemas.openxmlformats.org/drawingml/2006/main" noGrp="1"/>
-          </p:cNvSpPr>
-          <p:nvPr/>
-        </p:nvSpPr>
-        <p:spPr>
-          <a:xfrm xmlns:a="http://schemas.openxmlformats.org/drawingml/2006/main">
-            <a:off x="1714500" y="2181225"/>
-            <a:ext cx="9429750" cy="609600"/>
+                <a16:creationId xmlns:a16="http://schemas.microsoft.com/office/drawing/2014/main" id="{1B5789D5-30AD-44BA-9368-59733A337D97}"/>
+              </a:ext>
+            </a:extLst>
+          </p:cNvPr>
+          <p:cNvSpPr>
+            <a:spLocks xmlns:a="http://schemas.openxmlformats.org/drawingml/2006/main" noGrp="1"/>
+          </p:cNvSpPr>
+          <p:nvPr/>
+        </p:nvSpPr>
+        <p:spPr>
+          <a:xfrm xmlns:a="http://schemas.openxmlformats.org/drawingml/2006/main">
+            <a:off x="1714500" y="2114550"/>
+            <a:ext cx="9525000" cy="809625"/>
           </a:xfrm>
           <a:prstGeom xmlns:a="http://schemas.openxmlformats.org/drawingml/2006/main" prst="rect">
             <a:avLst/>
@@ -8383,7 +8385,7 @@
           <a:lstStyle xmlns:a="http://schemas.openxmlformats.org/drawingml/2006/main"/>
           <a:p xmlns:a="http://schemas.openxmlformats.org/drawingml/2006/main">
             <a:pPr algn="l">
-              <a:defRPr sz="1500" b="0">
+              <a:defRPr sz="1725" b="0">
                 <a:solidFill>
                   <a:srgbClr val="17253A"/>
                 </a:solidFill>
@@ -8393,7 +8395,7 @@
               </a:defRPr>
             </a:pPr>
             <a:r>
-              <a:rPr sz="1500" b="0">
+              <a:rPr sz="1725" b="0">
                 <a:solidFill>
                   <a:srgbClr val="17253A"/>
                 </a:solidFill>
@@ -8401,7 +8403,7 @@
                 <a:ea typeface="Arial"/>
                 <a:cs typeface="Arial"/>
               </a:rPr>
-              <a:t>Identify the structure: Retrieve the relevant fact or method before answering.</a:t>
+              <a:t>Books bought: 32 × 145 = 4,640</a:t>
             </a:r>
           </a:p>
         </p:txBody>
@@ -8411,28 +8413,30 @@
           <p:cNvPr id="14" name="">
             <a:extLst xmlns:a="http://schemas.openxmlformats.org/drawingml/2006/main">
               <a:ext uri="{FF2B5EF4-FFF2-40B4-BE49-F238E27FC236}">
-                <a16:creationId xmlns:a16="http://schemas.microsoft.com/office/drawing/2014/main" id="{E512127A-2C19-4D02-AD8B-B3CD4934FD94}"/>
-              </a:ext>
-            </a:extLst>
-          </p:cNvPr>
-          <p:cNvSpPr>
-            <a:spLocks xmlns:a="http://schemas.openxmlformats.org/drawingml/2006/main" noGrp="1"/>
-          </p:cNvSpPr>
-          <p:nvPr/>
-        </p:nvSpPr>
-        <p:spPr>
-          <a:xfrm xmlns:a="http://schemas.openxmlformats.org/drawingml/2006/main">
-            <a:off x="1000125" y="2990850"/>
-            <a:ext cx="476250" cy="476250"/>
-          </a:xfrm>
-          <a:prstGeom xmlns:a="http://schemas.openxmlformats.org/drawingml/2006/main" prst="ellipse">
+                <a16:creationId xmlns:a16="http://schemas.microsoft.com/office/drawing/2014/main" id="{F535B687-5348-42CD-81DC-C8B940DEE178}"/>
+              </a:ext>
+            </a:extLst>
+          </p:cNvPr>
+          <p:cNvSpPr>
+            <a:spLocks xmlns:a="http://schemas.openxmlformats.org/drawingml/2006/main" noGrp="1"/>
+          </p:cNvSpPr>
+          <p:nvPr/>
+        </p:nvSpPr>
+        <p:spPr>
+          <a:xfrm xmlns:a="http://schemas.openxmlformats.org/drawingml/2006/main">
+            <a:off x="1714500" y="2943225"/>
+            <a:ext cx="9334500" cy="9525"/>
+          </a:xfrm>
+          <a:prstGeom xmlns:a="http://schemas.openxmlformats.org/drawingml/2006/main" prst="rect">
             <a:avLst/>
           </a:prstGeom>
           <a:solidFill xmlns:a="http://schemas.openxmlformats.org/drawingml/2006/main">
-            <a:srgbClr val="2C6E73"/>
+            <a:srgbClr val="D9E0E6"/>
           </a:solidFill>
           <a:ln xmlns:a="http://schemas.openxmlformats.org/drawingml/2006/main" w="0">
-            <a:noFill/>
+            <a:solidFill>
+              <a:srgbClr val="D9E0E6"/>
+            </a:solidFill>
           </a:ln>
         </p:spPr>
       </p:sp>
@@ -8441,19 +8445,19 @@
           <p:cNvPr id="15" name="">
             <a:extLst xmlns:a="http://schemas.openxmlformats.org/drawingml/2006/main">
               <a:ext uri="{FF2B5EF4-FFF2-40B4-BE49-F238E27FC236}">
-                <a16:creationId xmlns:a16="http://schemas.microsoft.com/office/drawing/2014/main" id="{C0DDB740-72E9-40F0-ACF6-7B5B1A0142CA}"/>
-              </a:ext>
-            </a:extLst>
-          </p:cNvPr>
-          <p:cNvSpPr>
-            <a:spLocks xmlns:a="http://schemas.openxmlformats.org/drawingml/2006/main" noGrp="1"/>
-          </p:cNvSpPr>
-          <p:nvPr/>
-        </p:nvSpPr>
-        <p:spPr>
-          <a:xfrm xmlns:a="http://schemas.openxmlformats.org/drawingml/2006/main">
-            <a:off x="1000125" y="3019425"/>
-            <a:ext cx="476250" cy="419100"/>
+                <a16:creationId xmlns:a16="http://schemas.microsoft.com/office/drawing/2014/main" id="{41BE257B-F735-44B4-83C6-D070F404E835}"/>
+              </a:ext>
+            </a:extLst>
+          </p:cNvPr>
+          <p:cNvSpPr>
+            <a:spLocks xmlns:a="http://schemas.openxmlformats.org/drawingml/2006/main" noGrp="1"/>
+          </p:cNvSpPr>
+          <p:nvPr/>
+        </p:nvSpPr>
+        <p:spPr>
+          <a:xfrm xmlns:a="http://schemas.openxmlformats.org/drawingml/2006/main">
+            <a:off x="1162050" y="3076575"/>
+            <a:ext cx="400050" cy="400050"/>
           </a:xfrm>
           <a:prstGeom xmlns:a="http://schemas.openxmlformats.org/drawingml/2006/main" prst="rect">
             <a:avLst/>
@@ -8470,9 +8474,9 @@
           <a:lstStyle xmlns:a="http://schemas.openxmlformats.org/drawingml/2006/main"/>
           <a:p xmlns:a="http://schemas.openxmlformats.org/drawingml/2006/main">
             <a:pPr algn="ctr">
-              <a:defRPr sz="1350" b="1">
-                <a:solidFill>
-                  <a:srgbClr val="FFFFFF"/>
+              <a:defRPr sz="1125" b="1">
+                <a:solidFill>
+                  <a:srgbClr val="2C6E73"/>
                 </a:solidFill>
                 <a:latin typeface="Arial"/>
                 <a:ea typeface="Arial"/>
@@ -8480,9 +8484,9 @@
               </a:defRPr>
             </a:pPr>
             <a:r>
-              <a:rPr sz="1350" b="1">
-                <a:solidFill>
-                  <a:srgbClr val="FFFFFF"/>
+              <a:rPr sz="1125" b="1">
+                <a:solidFill>
+                  <a:srgbClr val="2C6E73"/>
                 </a:solidFill>
                 <a:latin typeface="Arial"/>
                 <a:ea typeface="Arial"/>
@@ -8498,19 +8502,19 @@
           <p:cNvPr id="16" name="">
             <a:extLst xmlns:a="http://schemas.openxmlformats.org/drawingml/2006/main">
               <a:ext uri="{FF2B5EF4-FFF2-40B4-BE49-F238E27FC236}">
-                <a16:creationId xmlns:a16="http://schemas.microsoft.com/office/drawing/2014/main" id="{E03E1EE6-A3B5-4308-9C08-EA5AFA68AF53}"/>
-              </a:ext>
-            </a:extLst>
-          </p:cNvPr>
-          <p:cNvSpPr>
-            <a:spLocks xmlns:a="http://schemas.openxmlformats.org/drawingml/2006/main" noGrp="1"/>
-          </p:cNvSpPr>
-          <p:nvPr/>
-        </p:nvSpPr>
-        <p:spPr>
-          <a:xfrm xmlns:a="http://schemas.openxmlformats.org/drawingml/2006/main">
-            <a:off x="1714500" y="2924175"/>
-            <a:ext cx="9429750" cy="609600"/>
+                <a16:creationId xmlns:a16="http://schemas.microsoft.com/office/drawing/2014/main" id="{58512FE7-8C4D-426B-8969-AD69F0DBD873}"/>
+              </a:ext>
+            </a:extLst>
+          </p:cNvPr>
+          <p:cNvSpPr>
+            <a:spLocks xmlns:a="http://schemas.openxmlformats.org/drawingml/2006/main" noGrp="1"/>
+          </p:cNvSpPr>
+          <p:nvPr/>
+        </p:nvSpPr>
+        <p:spPr>
+          <a:xfrm xmlns:a="http://schemas.openxmlformats.org/drawingml/2006/main">
+            <a:off x="1714500" y="2990850"/>
+            <a:ext cx="9525000" cy="809625"/>
           </a:xfrm>
           <a:prstGeom xmlns:a="http://schemas.openxmlformats.org/drawingml/2006/main" prst="rect">
             <a:avLst/>
@@ -8527,7 +8531,7 @@
           <a:lstStyle xmlns:a="http://schemas.openxmlformats.org/drawingml/2006/main"/>
           <a:p xmlns:a="http://schemas.openxmlformats.org/drawingml/2006/main">
             <a:pPr algn="l">
-              <a:defRPr sz="1500" b="0">
+              <a:defRPr sz="1725" b="0">
                 <a:solidFill>
                   <a:srgbClr val="17253A"/>
                 </a:solidFill>
@@ -8537,7 +8541,7 @@
               </a:defRPr>
             </a:pPr>
             <a:r>
-              <a:rPr sz="1500" b="0">
+              <a:rPr sz="1725" b="0">
                 <a:solidFill>
                   <a:srgbClr val="17253A"/>
                 </a:solidFill>
@@ -8545,7 +8549,7 @@
                 <a:ea typeface="Arial"/>
                 <a:cs typeface="Arial"/>
               </a:rPr>
-              <a:t>Set up the method: Show a clear calculation or representation and explain the decision.</a:t>
+              <a:t>Books given: 18 × 240 = 4,320</a:t>
             </a:r>
           </a:p>
         </p:txBody>
@@ -8555,28 +8559,30 @@
           <p:cNvPr id="17" name="">
             <a:extLst xmlns:a="http://schemas.openxmlformats.org/drawingml/2006/main">
               <a:ext uri="{FF2B5EF4-FFF2-40B4-BE49-F238E27FC236}">
-                <a16:creationId xmlns:a16="http://schemas.microsoft.com/office/drawing/2014/main" id="{E17729A2-951D-4554-B9A2-CE98BDC6E169}"/>
-              </a:ext>
-            </a:extLst>
-          </p:cNvPr>
-          <p:cNvSpPr>
-            <a:spLocks xmlns:a="http://schemas.openxmlformats.org/drawingml/2006/main" noGrp="1"/>
-          </p:cNvSpPr>
-          <p:nvPr/>
-        </p:nvSpPr>
-        <p:spPr>
-          <a:xfrm xmlns:a="http://schemas.openxmlformats.org/drawingml/2006/main">
-            <a:off x="1000125" y="3733800"/>
-            <a:ext cx="476250" cy="476250"/>
-          </a:xfrm>
-          <a:prstGeom xmlns:a="http://schemas.openxmlformats.org/drawingml/2006/main" prst="ellipse">
+                <a16:creationId xmlns:a16="http://schemas.microsoft.com/office/drawing/2014/main" id="{FBC1D36E-7748-43CA-9919-7F7B317DACDC}"/>
+              </a:ext>
+            </a:extLst>
+          </p:cNvPr>
+          <p:cNvSpPr>
+            <a:spLocks xmlns:a="http://schemas.openxmlformats.org/drawingml/2006/main" noGrp="1"/>
+          </p:cNvSpPr>
+          <p:nvPr/>
+        </p:nvSpPr>
+        <p:spPr>
+          <a:xfrm xmlns:a="http://schemas.openxmlformats.org/drawingml/2006/main">
+            <a:off x="1714500" y="3819525"/>
+            <a:ext cx="9334500" cy="9525"/>
+          </a:xfrm>
+          <a:prstGeom xmlns:a="http://schemas.openxmlformats.org/drawingml/2006/main" prst="rect">
             <a:avLst/>
           </a:prstGeom>
           <a:solidFill xmlns:a="http://schemas.openxmlformats.org/drawingml/2006/main">
-            <a:srgbClr val="2C6E73"/>
+            <a:srgbClr val="D9E0E6"/>
           </a:solidFill>
           <a:ln xmlns:a="http://schemas.openxmlformats.org/drawingml/2006/main" w="0">
-            <a:noFill/>
+            <a:solidFill>
+              <a:srgbClr val="D9E0E6"/>
+            </a:solidFill>
           </a:ln>
         </p:spPr>
       </p:sp>
@@ -8585,19 +8591,19 @@
           <p:cNvPr id="18" name="">
             <a:extLst xmlns:a="http://schemas.openxmlformats.org/drawingml/2006/main">
               <a:ext uri="{FF2B5EF4-FFF2-40B4-BE49-F238E27FC236}">
-                <a16:creationId xmlns:a16="http://schemas.microsoft.com/office/drawing/2014/main" id="{00C92FBB-DFD0-4E28-92E8-E0FD3E4878D3}"/>
-              </a:ext>
-            </a:extLst>
-          </p:cNvPr>
-          <p:cNvSpPr>
-            <a:spLocks xmlns:a="http://schemas.openxmlformats.org/drawingml/2006/main" noGrp="1"/>
-          </p:cNvSpPr>
-          <p:nvPr/>
-        </p:nvSpPr>
-        <p:spPr>
-          <a:xfrm xmlns:a="http://schemas.openxmlformats.org/drawingml/2006/main">
-            <a:off x="1000125" y="3762375"/>
-            <a:ext cx="476250" cy="419100"/>
+                <a16:creationId xmlns:a16="http://schemas.microsoft.com/office/drawing/2014/main" id="{109FA0E6-CB58-43A0-9870-D46331DC28EE}"/>
+              </a:ext>
+            </a:extLst>
+          </p:cNvPr>
+          <p:cNvSpPr>
+            <a:spLocks xmlns:a="http://schemas.openxmlformats.org/drawingml/2006/main" noGrp="1"/>
+          </p:cNvSpPr>
+          <p:nvPr/>
+        </p:nvSpPr>
+        <p:spPr>
+          <a:xfrm xmlns:a="http://schemas.openxmlformats.org/drawingml/2006/main">
+            <a:off x="1162050" y="3952875"/>
+            <a:ext cx="400050" cy="400050"/>
           </a:xfrm>
           <a:prstGeom xmlns:a="http://schemas.openxmlformats.org/drawingml/2006/main" prst="rect">
             <a:avLst/>
@@ -8614,9 +8620,9 @@
           <a:lstStyle xmlns:a="http://schemas.openxmlformats.org/drawingml/2006/main"/>
           <a:p xmlns:a="http://schemas.openxmlformats.org/drawingml/2006/main">
             <a:pPr algn="ctr">
-              <a:defRPr sz="1350" b="1">
-                <a:solidFill>
-                  <a:srgbClr val="FFFFFF"/>
+              <a:defRPr sz="1125" b="1">
+                <a:solidFill>
+                  <a:srgbClr val="2C6E73"/>
                 </a:solidFill>
                 <a:latin typeface="Arial"/>
                 <a:ea typeface="Arial"/>
@@ -8624,9 +8630,9 @@
               </a:defRPr>
             </a:pPr>
             <a:r>
-              <a:rPr sz="1350" b="1">
-                <a:solidFill>
-                  <a:srgbClr val="FFFFFF"/>
+              <a:rPr sz="1125" b="1">
+                <a:solidFill>
+                  <a:srgbClr val="2C6E73"/>
                 </a:solidFill>
                 <a:latin typeface="Arial"/>
                 <a:ea typeface="Arial"/>
@@ -8642,19 +8648,19 @@
           <p:cNvPr id="19" name="">
             <a:extLst xmlns:a="http://schemas.openxmlformats.org/drawingml/2006/main">
               <a:ext uri="{FF2B5EF4-FFF2-40B4-BE49-F238E27FC236}">
-                <a16:creationId xmlns:a16="http://schemas.microsoft.com/office/drawing/2014/main" id="{1E6163FB-9A37-44DE-A1A8-7A5A96ADD0AB}"/>
-              </a:ext>
-            </a:extLst>
-          </p:cNvPr>
-          <p:cNvSpPr>
-            <a:spLocks xmlns:a="http://schemas.openxmlformats.org/drawingml/2006/main" noGrp="1"/>
-          </p:cNvSpPr>
-          <p:nvPr/>
-        </p:nvSpPr>
-        <p:spPr>
-          <a:xfrm xmlns:a="http://schemas.openxmlformats.org/drawingml/2006/main">
-            <a:off x="1714500" y="3667125"/>
-            <a:ext cx="9429750" cy="609600"/>
+                <a16:creationId xmlns:a16="http://schemas.microsoft.com/office/drawing/2014/main" id="{552A0E4C-76DE-4CBC-927D-48B915859072}"/>
+              </a:ext>
+            </a:extLst>
+          </p:cNvPr>
+          <p:cNvSpPr>
+            <a:spLocks xmlns:a="http://schemas.openxmlformats.org/drawingml/2006/main" noGrp="1"/>
+          </p:cNvSpPr>
+          <p:nvPr/>
+        </p:nvSpPr>
+        <p:spPr>
+          <a:xfrm xmlns:a="http://schemas.openxmlformats.org/drawingml/2006/main">
+            <a:off x="1714500" y="3867150"/>
+            <a:ext cx="9525000" cy="809625"/>
           </a:xfrm>
           <a:prstGeom xmlns:a="http://schemas.openxmlformats.org/drawingml/2006/main" prst="rect">
             <a:avLst/>
@@ -8671,7 +8677,7 @@
           <a:lstStyle xmlns:a="http://schemas.openxmlformats.org/drawingml/2006/main"/>
           <a:p xmlns:a="http://schemas.openxmlformats.org/drawingml/2006/main">
             <a:pPr algn="l">
-              <a:defRPr sz="1500" b="0">
+              <a:defRPr sz="1725" b="0">
                 <a:solidFill>
                   <a:srgbClr val="17253A"/>
                 </a:solidFill>
@@ -8681,7 +8687,7 @@
               </a:defRPr>
             </a:pPr>
             <a:r>
-              <a:rPr sz="1500" b="0">
+              <a:rPr sz="1725" b="0">
                 <a:solidFill>
                   <a:srgbClr val="17253A"/>
                 </a:solidFill>
@@ -8689,7 +8695,7 @@
                 <a:ea typeface="Arial"/>
                 <a:cs typeface="Arial"/>
               </a:rPr>
-              <a:t>Complete the calculation: 320 books.</a:t>
+              <a:t>4,640 - 4,320</a:t>
             </a:r>
           </a:p>
         </p:txBody>
@@ -8699,28 +8705,30 @@
           <p:cNvPr id="20" name="">
             <a:extLst xmlns:a="http://schemas.openxmlformats.org/drawingml/2006/main">
               <a:ext uri="{FF2B5EF4-FFF2-40B4-BE49-F238E27FC236}">
-                <a16:creationId xmlns:a16="http://schemas.microsoft.com/office/drawing/2014/main" id="{DBAC2A1B-A8C5-415F-B5B5-B3BD013D65A2}"/>
-              </a:ext>
-            </a:extLst>
-          </p:cNvPr>
-          <p:cNvSpPr>
-            <a:spLocks xmlns:a="http://schemas.openxmlformats.org/drawingml/2006/main" noGrp="1"/>
-          </p:cNvSpPr>
-          <p:nvPr/>
-        </p:nvSpPr>
-        <p:spPr>
-          <a:xfrm xmlns:a="http://schemas.openxmlformats.org/drawingml/2006/main">
-            <a:off x="1000125" y="4476750"/>
-            <a:ext cx="476250" cy="476250"/>
-          </a:xfrm>
-          <a:prstGeom xmlns:a="http://schemas.openxmlformats.org/drawingml/2006/main" prst="ellipse">
+                <a16:creationId xmlns:a16="http://schemas.microsoft.com/office/drawing/2014/main" id="{2D6F2136-3AD7-43E7-A8B2-C7066B4DC13A}"/>
+              </a:ext>
+            </a:extLst>
+          </p:cNvPr>
+          <p:cNvSpPr>
+            <a:spLocks xmlns:a="http://schemas.openxmlformats.org/drawingml/2006/main" noGrp="1"/>
+          </p:cNvSpPr>
+          <p:nvPr/>
+        </p:nvSpPr>
+        <p:spPr>
+          <a:xfrm xmlns:a="http://schemas.openxmlformats.org/drawingml/2006/main">
+            <a:off x="1714500" y="4695825"/>
+            <a:ext cx="9334500" cy="9525"/>
+          </a:xfrm>
+          <a:prstGeom xmlns:a="http://schemas.openxmlformats.org/drawingml/2006/main" prst="rect">
             <a:avLst/>
           </a:prstGeom>
           <a:solidFill xmlns:a="http://schemas.openxmlformats.org/drawingml/2006/main">
-            <a:srgbClr val="2C6E73"/>
+            <a:srgbClr val="D9E0E6"/>
           </a:solidFill>
           <a:ln xmlns:a="http://schemas.openxmlformats.org/drawingml/2006/main" w="0">
-            <a:noFill/>
+            <a:solidFill>
+              <a:srgbClr val="D9E0E6"/>
+            </a:solidFill>
           </a:ln>
         </p:spPr>
       </p:sp>
@@ -8729,19 +8737,19 @@
           <p:cNvPr id="21" name="">
             <a:extLst xmlns:a="http://schemas.openxmlformats.org/drawingml/2006/main">
               <a:ext uri="{FF2B5EF4-FFF2-40B4-BE49-F238E27FC236}">
-                <a16:creationId xmlns:a16="http://schemas.microsoft.com/office/drawing/2014/main" id="{BE36C973-E509-43ED-9FB4-A612D078E845}"/>
-              </a:ext>
-            </a:extLst>
-          </p:cNvPr>
-          <p:cNvSpPr>
-            <a:spLocks xmlns:a="http://schemas.openxmlformats.org/drawingml/2006/main" noGrp="1"/>
-          </p:cNvSpPr>
-          <p:nvPr/>
-        </p:nvSpPr>
-        <p:spPr>
-          <a:xfrm xmlns:a="http://schemas.openxmlformats.org/drawingml/2006/main">
-            <a:off x="1000125" y="4505325"/>
-            <a:ext cx="476250" cy="419100"/>
+                <a16:creationId xmlns:a16="http://schemas.microsoft.com/office/drawing/2014/main" id="{941A0C89-3B59-4545-B98B-CC9628CDFD34}"/>
+              </a:ext>
+            </a:extLst>
+          </p:cNvPr>
+          <p:cNvSpPr>
+            <a:spLocks xmlns:a="http://schemas.openxmlformats.org/drawingml/2006/main" noGrp="1"/>
+          </p:cNvSpPr>
+          <p:nvPr/>
+        </p:nvSpPr>
+        <p:spPr>
+          <a:xfrm xmlns:a="http://schemas.openxmlformats.org/drawingml/2006/main">
+            <a:off x="1162050" y="4829175"/>
+            <a:ext cx="400050" cy="400050"/>
           </a:xfrm>
           <a:prstGeom xmlns:a="http://schemas.openxmlformats.org/drawingml/2006/main" prst="rect">
             <a:avLst/>
@@ -8758,9 +8766,9 @@
           <a:lstStyle xmlns:a="http://schemas.openxmlformats.org/drawingml/2006/main"/>
           <a:p xmlns:a="http://schemas.openxmlformats.org/drawingml/2006/main">
             <a:pPr algn="ctr">
-              <a:defRPr sz="1350" b="1">
-                <a:solidFill>
-                  <a:srgbClr val="FFFFFF"/>
+              <a:defRPr sz="1125" b="1">
+                <a:solidFill>
+                  <a:srgbClr val="2F785D"/>
                 </a:solidFill>
                 <a:latin typeface="Arial"/>
                 <a:ea typeface="Arial"/>
@@ -8768,9 +8776,9 @@
               </a:defRPr>
             </a:pPr>
             <a:r>
-              <a:rPr sz="1350" b="1">
-                <a:solidFill>
-                  <a:srgbClr val="FFFFFF"/>
+              <a:rPr sz="1125" b="1">
+                <a:solidFill>
+                  <a:srgbClr val="2F785D"/>
                 </a:solidFill>
                 <a:latin typeface="Arial"/>
                 <a:ea typeface="Arial"/>
@@ -8786,19 +8794,19 @@
           <p:cNvPr id="22" name="">
             <a:extLst xmlns:a="http://schemas.openxmlformats.org/drawingml/2006/main">
               <a:ext uri="{FF2B5EF4-FFF2-40B4-BE49-F238E27FC236}">
-                <a16:creationId xmlns:a16="http://schemas.microsoft.com/office/drawing/2014/main" id="{D04B7356-880F-487C-AB6E-CAA827F36CF3}"/>
-              </a:ext>
-            </a:extLst>
-          </p:cNvPr>
-          <p:cNvSpPr>
-            <a:spLocks xmlns:a="http://schemas.openxmlformats.org/drawingml/2006/main" noGrp="1"/>
-          </p:cNvSpPr>
-          <p:nvPr/>
-        </p:nvSpPr>
-        <p:spPr>
-          <a:xfrm xmlns:a="http://schemas.openxmlformats.org/drawingml/2006/main">
-            <a:off x="1714500" y="4410075"/>
-            <a:ext cx="9429750" cy="609600"/>
+                <a16:creationId xmlns:a16="http://schemas.microsoft.com/office/drawing/2014/main" id="{F0E1FDC5-6F32-4349-ABAD-B26F59736AA6}"/>
+              </a:ext>
+            </a:extLst>
+          </p:cNvPr>
+          <p:cNvSpPr>
+            <a:spLocks xmlns:a="http://schemas.openxmlformats.org/drawingml/2006/main" noGrp="1"/>
+          </p:cNvSpPr>
+          <p:nvPr/>
+        </p:nvSpPr>
+        <p:spPr>
+          <a:xfrm xmlns:a="http://schemas.openxmlformats.org/drawingml/2006/main">
+            <a:off x="1714500" y="4743450"/>
+            <a:ext cx="9525000" cy="809625"/>
           </a:xfrm>
           <a:prstGeom xmlns:a="http://schemas.openxmlformats.org/drawingml/2006/main" prst="rect">
             <a:avLst/>
@@ -8815,7 +8823,7 @@
           <a:lstStyle xmlns:a="http://schemas.openxmlformats.org/drawingml/2006/main"/>
           <a:p xmlns:a="http://schemas.openxmlformats.org/drawingml/2006/main">
             <a:pPr algn="l">
-              <a:defRPr sz="1500" b="1">
+              <a:defRPr sz="1725" b="1">
                 <a:solidFill>
                   <a:srgbClr val="2F785D"/>
                 </a:solidFill>
@@ -8825,7 +8833,7 @@
               </a:defRPr>
             </a:pPr>
             <a:r>
-              <a:rPr sz="1500" b="1">
+              <a:rPr sz="1725" b="1">
                 <a:solidFill>
                   <a:srgbClr val="2F785D"/>
                 </a:solidFill>
@@ -8833,7 +8841,7 @@
                 <a:ea typeface="Arial"/>
                 <a:cs typeface="Arial"/>
               </a:rPr>
-              <a:t>Check the result: Check the result, identify any misconception and record the next step.</a:t>
+              <a:t>320 books remain</a:t>
             </a:r>
           </a:p>
         </p:txBody>
@@ -8841,7 +8849,7 @@
     </p:spTree>
     <p:extLst>
       <p:ext uri="{BB962C8B-B14F-4D97-AF65-F5344CB8AC3E}">
-        <p14:creationId xmlns:p14="http://schemas.microsoft.com/office/powerpoint/2010/main" val="1410118474"/>
+        <p14:creationId xmlns:p14="http://schemas.microsoft.com/office/powerpoint/2010/main" val="305734980"/>
       </p:ext>
     </p:extLst>
   </p:cSld>
@@ -9134,7 +9142,7 @@
           <p:cNvPr id="15" name="">
             <a:extLst xmlns:a="http://schemas.openxmlformats.org/drawingml/2006/main">
               <a:ext uri="{FF2B5EF4-FFF2-40B4-BE49-F238E27FC236}">
-                <a16:creationId xmlns:a16="http://schemas.microsoft.com/office/drawing/2014/main" id="{22A3F39B-12B0-4F4E-91C9-CBCD6DBE80AA}"/>
+                <a16:creationId xmlns:a16="http://schemas.microsoft.com/office/drawing/2014/main" id="{3C45D6B3-1991-42CF-B15D-908BF58C047B}"/>
               </a:ext>
             </a:extLst>
           </p:cNvPr>
@@ -9166,7 +9174,7 @@
           <p:cNvPr id="2" name="">
             <a:extLst xmlns:a="http://schemas.openxmlformats.org/drawingml/2006/main">
               <a:ext uri="{FF2B5EF4-FFF2-40B4-BE49-F238E27FC236}">
-                <a16:creationId xmlns:a16="http://schemas.microsoft.com/office/drawing/2014/main" id="{8436DB01-E322-444C-804B-799CCAD6FDD0}"/>
+                <a16:creationId xmlns:a16="http://schemas.microsoft.com/office/drawing/2014/main" id="{4C47C551-AB38-404D-A25F-3634911D3474}"/>
               </a:ext>
             </a:extLst>
           </p:cNvPr>
@@ -9223,7 +9231,7 @@
           <p:cNvPr id="3" name="">
             <a:extLst xmlns:a="http://schemas.openxmlformats.org/drawingml/2006/main">
               <a:ext uri="{FF2B5EF4-FFF2-40B4-BE49-F238E27FC236}">
-                <a16:creationId xmlns:a16="http://schemas.microsoft.com/office/drawing/2014/main" id="{05AC0510-E87F-4A43-9ACA-39F4B5B2B398}"/>
+                <a16:creationId xmlns:a16="http://schemas.microsoft.com/office/drawing/2014/main" id="{E8AEBFB5-D760-4C0A-86C8-14845CE7B68A}"/>
               </a:ext>
             </a:extLst>
           </p:cNvPr>
@@ -9255,7 +9263,7 @@
           <p:cNvPr id="4" name="">
             <a:extLst xmlns:a="http://schemas.openxmlformats.org/drawingml/2006/main">
               <a:ext uri="{FF2B5EF4-FFF2-40B4-BE49-F238E27FC236}">
-                <a16:creationId xmlns:a16="http://schemas.microsoft.com/office/drawing/2014/main" id="{80EE34C0-0450-4532-8E54-E24FFCE09E1E}"/>
+                <a16:creationId xmlns:a16="http://schemas.microsoft.com/office/drawing/2014/main" id="{CCD51ED6-DA8A-47F9-A13D-D1CBB5036D2F}"/>
               </a:ext>
             </a:extLst>
           </p:cNvPr>
@@ -9312,7 +9320,7 @@
           <p:cNvPr id="5" name="">
             <a:extLst xmlns:a="http://schemas.openxmlformats.org/drawingml/2006/main">
               <a:ext uri="{FF2B5EF4-FFF2-40B4-BE49-F238E27FC236}">
-                <a16:creationId xmlns:a16="http://schemas.microsoft.com/office/drawing/2014/main" id="{00B7E525-E6E6-45EC-9F80-6CD0F0A16A1F}"/>
+                <a16:creationId xmlns:a16="http://schemas.microsoft.com/office/drawing/2014/main" id="{A37DF438-DEB2-4109-80E4-F025116FF3FE}"/>
               </a:ext>
             </a:extLst>
           </p:cNvPr>
@@ -9369,7 +9377,7 @@
           <p:cNvPr id="6" name="">
             <a:extLst xmlns:a="http://schemas.openxmlformats.org/drawingml/2006/main">
               <a:ext uri="{FF2B5EF4-FFF2-40B4-BE49-F238E27FC236}">
-                <a16:creationId xmlns:a16="http://schemas.microsoft.com/office/drawing/2014/main" id="{7EA1B79B-D45E-4480-937B-85F2CF8579AF}"/>
+                <a16:creationId xmlns:a16="http://schemas.microsoft.com/office/drawing/2014/main" id="{F1699F49-9B4E-401F-9439-8CEAAC423E4E}"/>
               </a:ext>
             </a:extLst>
           </p:cNvPr>
@@ -9426,7 +9434,7 @@
           <p:cNvPr id="7" name="">
             <a:extLst xmlns:a="http://schemas.openxmlformats.org/drawingml/2006/main">
               <a:ext uri="{FF2B5EF4-FFF2-40B4-BE49-F238E27FC236}">
-                <a16:creationId xmlns:a16="http://schemas.microsoft.com/office/drawing/2014/main" id="{2F97DA23-69A1-433F-8160-5E3BAD04BCEA}"/>
+                <a16:creationId xmlns:a16="http://schemas.microsoft.com/office/drawing/2014/main" id="{4A4F89FF-27D6-483C-A96C-AC8F343B1ADD}"/>
               </a:ext>
             </a:extLst>
           </p:cNvPr>
@@ -9458,7 +9466,7 @@
           <p:cNvPr id="8" name="">
             <a:extLst xmlns:a="http://schemas.openxmlformats.org/drawingml/2006/main">
               <a:ext uri="{FF2B5EF4-FFF2-40B4-BE49-F238E27FC236}">
-                <a16:creationId xmlns:a16="http://schemas.microsoft.com/office/drawing/2014/main" id="{C51AC403-8028-4730-820D-3B38006A5C5C}"/>
+                <a16:creationId xmlns:a16="http://schemas.microsoft.com/office/drawing/2014/main" id="{2F2C2CA9-1187-420E-A443-E28096C7F1AA}"/>
               </a:ext>
             </a:extLst>
           </p:cNvPr>
@@ -9515,7 +9523,7 @@
           <p:cNvPr id="9" name="">
             <a:extLst xmlns:a="http://schemas.openxmlformats.org/drawingml/2006/main">
               <a:ext uri="{FF2B5EF4-FFF2-40B4-BE49-F238E27FC236}">
-                <a16:creationId xmlns:a16="http://schemas.microsoft.com/office/drawing/2014/main" id="{CC399644-9AC4-4A55-A47B-10051EBBA267}"/>
+                <a16:creationId xmlns:a16="http://schemas.microsoft.com/office/drawing/2014/main" id="{5E0D005B-3ABD-408B-8F92-76EC7AE53757}"/>
               </a:ext>
             </a:extLst>
           </p:cNvPr>
@@ -9572,7 +9580,7 @@
           <p:cNvPr id="10" name="">
             <a:extLst xmlns:a="http://schemas.openxmlformats.org/drawingml/2006/main">
               <a:ext uri="{FF2B5EF4-FFF2-40B4-BE49-F238E27FC236}">
-                <a16:creationId xmlns:a16="http://schemas.microsoft.com/office/drawing/2014/main" id="{2D1F763A-22CA-4BCF-8F97-126CBBCA169F}"/>
+                <a16:creationId xmlns:a16="http://schemas.microsoft.com/office/drawing/2014/main" id="{9994C160-38A4-4259-B30F-0741844FB2EC}"/>
               </a:ext>
             </a:extLst>
           </p:cNvPr>
@@ -9629,7 +9637,7 @@
           <p:cNvPr id="11" name="">
             <a:extLst xmlns:a="http://schemas.openxmlformats.org/drawingml/2006/main">
               <a:ext uri="{FF2B5EF4-FFF2-40B4-BE49-F238E27FC236}">
-                <a16:creationId xmlns:a16="http://schemas.microsoft.com/office/drawing/2014/main" id="{8653344B-63BB-47B2-AFF2-84ABB6AABE43}"/>
+                <a16:creationId xmlns:a16="http://schemas.microsoft.com/office/drawing/2014/main" id="{16FC0887-C12B-4B4A-B52A-F23C66210021}"/>
               </a:ext>
             </a:extLst>
           </p:cNvPr>
@@ -9686,7 +9694,7 @@
           <p:cNvPr id="12" name="">
             <a:extLst xmlns:a="http://schemas.openxmlformats.org/drawingml/2006/main">
               <a:ext uri="{FF2B5EF4-FFF2-40B4-BE49-F238E27FC236}">
-                <a16:creationId xmlns:a16="http://schemas.microsoft.com/office/drawing/2014/main" id="{314CDA80-02A7-487C-B63F-788E40B88A4B}"/>
+                <a16:creationId xmlns:a16="http://schemas.microsoft.com/office/drawing/2014/main" id="{4EAC248B-76E1-4C11-AB8C-1107654810EE}"/>
               </a:ext>
             </a:extLst>
           </p:cNvPr>
@@ -9718,7 +9726,7 @@
           <p:cNvPr id="13" name="">
             <a:extLst xmlns:a="http://schemas.openxmlformats.org/drawingml/2006/main">
               <a:ext uri="{FF2B5EF4-FFF2-40B4-BE49-F238E27FC236}">
-                <a16:creationId xmlns:a16="http://schemas.microsoft.com/office/drawing/2014/main" id="{7938E7D7-C369-459F-AC2E-E595E7E55B68}"/>
+                <a16:creationId xmlns:a16="http://schemas.microsoft.com/office/drawing/2014/main" id="{C4AF1EF8-BB91-42C1-A8D1-3D6F16E98923}"/>
               </a:ext>
             </a:extLst>
           </p:cNvPr>
@@ -9775,7 +9783,7 @@
           <p:cNvPr id="14" name="">
             <a:extLst xmlns:a="http://schemas.openxmlformats.org/drawingml/2006/main">
               <a:ext uri="{FF2B5EF4-FFF2-40B4-BE49-F238E27FC236}">
-                <a16:creationId xmlns:a16="http://schemas.microsoft.com/office/drawing/2014/main" id="{14990D17-9DB8-4EE1-8FDE-A99AFBDE744A}"/>
+                <a16:creationId xmlns:a16="http://schemas.microsoft.com/office/drawing/2014/main" id="{90FE13B9-E50B-49E0-8014-9C45786DEB29}"/>
               </a:ext>
             </a:extLst>
           </p:cNvPr>
@@ -9830,7 +9838,7 @@
     </p:spTree>
     <p:extLst>
       <p:ext uri="{BB962C8B-B14F-4D97-AF65-F5344CB8AC3E}">
-        <p14:creationId xmlns:p14="http://schemas.microsoft.com/office/powerpoint/2010/main" val="629119940"/>
+        <p14:creationId xmlns:p14="http://schemas.microsoft.com/office/powerpoint/2010/main" val="456970023"/>
       </p:ext>
     </p:extLst>
   </p:cSld>
@@ -10031,7 +10039,7 @@
           <p:cNvPr id="16" name="">
             <a:extLst xmlns:a="http://schemas.openxmlformats.org/drawingml/2006/main">
               <a:ext uri="{FF2B5EF4-FFF2-40B4-BE49-F238E27FC236}">
-                <a16:creationId xmlns:a16="http://schemas.microsoft.com/office/drawing/2014/main" id="{58B9089B-5BDB-4716-B4EA-F15D32DEC90B}"/>
+                <a16:creationId xmlns:a16="http://schemas.microsoft.com/office/drawing/2014/main" id="{E930BC65-1697-4A89-8E17-6C6531838A03}"/>
               </a:ext>
             </a:extLst>
           </p:cNvPr>
@@ -10063,7 +10071,7 @@
           <p:cNvPr id="2" name="">
             <a:extLst xmlns:a="http://schemas.openxmlformats.org/drawingml/2006/main">
               <a:ext uri="{FF2B5EF4-FFF2-40B4-BE49-F238E27FC236}">
-                <a16:creationId xmlns:a16="http://schemas.microsoft.com/office/drawing/2014/main" id="{71EAB58B-7971-470B-ABB2-DBED9C438B8D}"/>
+                <a16:creationId xmlns:a16="http://schemas.microsoft.com/office/drawing/2014/main" id="{EDEA5DBE-3158-4850-A497-ACE74D2AA26A}"/>
               </a:ext>
             </a:extLst>
           </p:cNvPr>
@@ -10120,7 +10128,7 @@
           <p:cNvPr id="3" name="">
             <a:extLst xmlns:a="http://schemas.openxmlformats.org/drawingml/2006/main">
               <a:ext uri="{FF2B5EF4-FFF2-40B4-BE49-F238E27FC236}">
-                <a16:creationId xmlns:a16="http://schemas.microsoft.com/office/drawing/2014/main" id="{BD62B2B9-5C85-4AF4-A52D-515D9E6C3DEA}"/>
+                <a16:creationId xmlns:a16="http://schemas.microsoft.com/office/drawing/2014/main" id="{75FE900F-BB8D-42D7-82A4-5EA3E1868307}"/>
               </a:ext>
             </a:extLst>
           </p:cNvPr>
@@ -10152,7 +10160,7 @@
           <p:cNvPr id="4" name="">
             <a:extLst xmlns:a="http://schemas.openxmlformats.org/drawingml/2006/main">
               <a:ext uri="{FF2B5EF4-FFF2-40B4-BE49-F238E27FC236}">
-                <a16:creationId xmlns:a16="http://schemas.microsoft.com/office/drawing/2014/main" id="{C0733DB6-3F4A-4E16-A717-85316DC0AA38}"/>
+                <a16:creationId xmlns:a16="http://schemas.microsoft.com/office/drawing/2014/main" id="{1D72E49F-96B6-4FFC-B39F-631D24E6B89D}"/>
               </a:ext>
             </a:extLst>
           </p:cNvPr>
@@ -10209,7 +10217,7 @@
           <p:cNvPr id="5" name="">
             <a:extLst xmlns:a="http://schemas.openxmlformats.org/drawingml/2006/main">
               <a:ext uri="{FF2B5EF4-FFF2-40B4-BE49-F238E27FC236}">
-                <a16:creationId xmlns:a16="http://schemas.microsoft.com/office/drawing/2014/main" id="{66D1D2BD-D6CA-4D7B-975A-E6B9177005C5}"/>
+                <a16:creationId xmlns:a16="http://schemas.microsoft.com/office/drawing/2014/main" id="{0EB2406A-9012-40B1-BD19-3F134B2A378F}"/>
               </a:ext>
             </a:extLst>
           </p:cNvPr>
@@ -10266,7 +10274,7 @@
           <p:cNvPr id="6" name="">
             <a:extLst xmlns:a="http://schemas.openxmlformats.org/drawingml/2006/main">
               <a:ext uri="{FF2B5EF4-FFF2-40B4-BE49-F238E27FC236}">
-                <a16:creationId xmlns:a16="http://schemas.microsoft.com/office/drawing/2014/main" id="{041DCCA3-0B1B-4F1D-A761-F17058FDFD43}"/>
+                <a16:creationId xmlns:a16="http://schemas.microsoft.com/office/drawing/2014/main" id="{9A621505-0F35-4D3C-90E2-BBBEB8152FC2}"/>
               </a:ext>
             </a:extLst>
           </p:cNvPr>
@@ -10323,7 +10331,7 @@
           <p:cNvPr id="7" name="">
             <a:extLst xmlns:a="http://schemas.openxmlformats.org/drawingml/2006/main">
               <a:ext uri="{FF2B5EF4-FFF2-40B4-BE49-F238E27FC236}">
-                <a16:creationId xmlns:a16="http://schemas.microsoft.com/office/drawing/2014/main" id="{BCFF152E-E5E2-4BEC-8DD3-493EB2587854}"/>
+                <a16:creationId xmlns:a16="http://schemas.microsoft.com/office/drawing/2014/main" id="{64F2B6DE-C744-4DF3-B546-7BD097167BC6}"/>
               </a:ext>
             </a:extLst>
           </p:cNvPr>
@@ -10355,7 +10363,7 @@
           <p:cNvPr id="8" name="">
             <a:extLst xmlns:a="http://schemas.openxmlformats.org/drawingml/2006/main">
               <a:ext uri="{FF2B5EF4-FFF2-40B4-BE49-F238E27FC236}">
-                <a16:creationId xmlns:a16="http://schemas.microsoft.com/office/drawing/2014/main" id="{A6F68085-286D-4EFD-85B4-5B34B0FAC6D7}"/>
+                <a16:creationId xmlns:a16="http://schemas.microsoft.com/office/drawing/2014/main" id="{F83A3BA4-1402-460F-936B-32FC70F0215C}"/>
               </a:ext>
             </a:extLst>
           </p:cNvPr>
@@ -10412,7 +10420,7 @@
           <p:cNvPr id="9" name="">
             <a:extLst xmlns:a="http://schemas.openxmlformats.org/drawingml/2006/main">
               <a:ext uri="{FF2B5EF4-FFF2-40B4-BE49-F238E27FC236}">
-                <a16:creationId xmlns:a16="http://schemas.microsoft.com/office/drawing/2014/main" id="{66CF0665-2832-4AE9-AA25-1D508339B89A}"/>
+                <a16:creationId xmlns:a16="http://schemas.microsoft.com/office/drawing/2014/main" id="{5CBCD440-D773-4A88-B704-D46601846AB7}"/>
               </a:ext>
             </a:extLst>
           </p:cNvPr>
@@ -10469,7 +10477,7 @@
           <p:cNvPr id="10" name="">
             <a:extLst xmlns:a="http://schemas.openxmlformats.org/drawingml/2006/main">
               <a:ext uri="{FF2B5EF4-FFF2-40B4-BE49-F238E27FC236}">
-                <a16:creationId xmlns:a16="http://schemas.microsoft.com/office/drawing/2014/main" id="{78DB2A46-33D6-46DB-BF5F-CE45665CA4A0}"/>
+                <a16:creationId xmlns:a16="http://schemas.microsoft.com/office/drawing/2014/main" id="{25472F6A-E229-4453-80D7-CABD3F3AE8DE}"/>
               </a:ext>
             </a:extLst>
           </p:cNvPr>
@@ -10526,7 +10534,7 @@
           <p:cNvPr id="11" name="">
             <a:extLst xmlns:a="http://schemas.openxmlformats.org/drawingml/2006/main">
               <a:ext uri="{FF2B5EF4-FFF2-40B4-BE49-F238E27FC236}">
-                <a16:creationId xmlns:a16="http://schemas.microsoft.com/office/drawing/2014/main" id="{5ED34F7D-628F-446D-AD7C-8BB846B4BAC1}"/>
+                <a16:creationId xmlns:a16="http://schemas.microsoft.com/office/drawing/2014/main" id="{C41BC67D-78C9-44DA-BACE-CF6FB92E3F04}"/>
               </a:ext>
             </a:extLst>
           </p:cNvPr>
@@ -10583,7 +10591,7 @@
           <p:cNvPr id="12" name="">
             <a:extLst xmlns:a="http://schemas.openxmlformats.org/drawingml/2006/main">
               <a:ext uri="{FF2B5EF4-FFF2-40B4-BE49-F238E27FC236}">
-                <a16:creationId xmlns:a16="http://schemas.microsoft.com/office/drawing/2014/main" id="{BBD89F8D-8A27-4A41-97A1-CC14C5368D23}"/>
+                <a16:creationId xmlns:a16="http://schemas.microsoft.com/office/drawing/2014/main" id="{3CC45440-8B76-48A2-8ACB-A8F5C1B93B3F}"/>
               </a:ext>
             </a:extLst>
           </p:cNvPr>
@@ -10640,7 +10648,7 @@
           <p:cNvPr id="13" name="">
             <a:extLst xmlns:a="http://schemas.openxmlformats.org/drawingml/2006/main">
               <a:ext uri="{FF2B5EF4-FFF2-40B4-BE49-F238E27FC236}">
-                <a16:creationId xmlns:a16="http://schemas.microsoft.com/office/drawing/2014/main" id="{2C3FE038-319D-4BFE-BC76-442F6E296A78}"/>
+                <a16:creationId xmlns:a16="http://schemas.microsoft.com/office/drawing/2014/main" id="{0B79C136-7C7A-4962-B88D-73963703AAFE}"/>
               </a:ext>
             </a:extLst>
           </p:cNvPr>
@@ -10697,7 +10705,7 @@
           <p:cNvPr id="14" name="">
             <a:extLst xmlns:a="http://schemas.openxmlformats.org/drawingml/2006/main">
               <a:ext uri="{FF2B5EF4-FFF2-40B4-BE49-F238E27FC236}">
-                <a16:creationId xmlns:a16="http://schemas.microsoft.com/office/drawing/2014/main" id="{87A80676-4F2B-483C-A267-6253BBA810DD}"/>
+                <a16:creationId xmlns:a16="http://schemas.microsoft.com/office/drawing/2014/main" id="{7AE2F679-7239-44C1-B912-3B31BC9FD9FA}"/>
               </a:ext>
             </a:extLst>
           </p:cNvPr>
@@ -10754,7 +10762,7 @@
           <p:cNvPr id="15" name="">
             <a:extLst xmlns:a="http://schemas.openxmlformats.org/drawingml/2006/main">
               <a:ext uri="{FF2B5EF4-FFF2-40B4-BE49-F238E27FC236}">
-                <a16:creationId xmlns:a16="http://schemas.microsoft.com/office/drawing/2014/main" id="{5CE82943-BFB0-409E-9BAC-65AF9C7572A0}"/>
+                <a16:creationId xmlns:a16="http://schemas.microsoft.com/office/drawing/2014/main" id="{82F3D52F-51AF-4CDD-B21B-0D93FBEDA759}"/>
               </a:ext>
             </a:extLst>
           </p:cNvPr>
@@ -10809,7 +10817,7 @@
     </p:spTree>
     <p:extLst>
       <p:ext uri="{BB962C8B-B14F-4D97-AF65-F5344CB8AC3E}">
-        <p14:creationId xmlns:p14="http://schemas.microsoft.com/office/powerpoint/2010/main" val="1416746313"/>
+        <p14:creationId xmlns:p14="http://schemas.microsoft.com/office/powerpoint/2010/main" val="1293708935"/>
       </p:ext>
     </p:extLst>
   </p:cSld>
@@ -10964,7 +10972,7 @@
           <p:cNvPr id="16" name="">
             <a:extLst xmlns:a="http://schemas.openxmlformats.org/drawingml/2006/main">
               <a:ext uri="{FF2B5EF4-FFF2-40B4-BE49-F238E27FC236}">
-                <a16:creationId xmlns:a16="http://schemas.microsoft.com/office/drawing/2014/main" id="{630AAE6B-F7F5-4FB3-9326-2B42631C5212}"/>
+                <a16:creationId xmlns:a16="http://schemas.microsoft.com/office/drawing/2014/main" id="{4D6B5566-5CC1-4C90-AEB4-C9BC4E208116}"/>
               </a:ext>
             </a:extLst>
           </p:cNvPr>
@@ -10996,7 +11004,7 @@
           <p:cNvPr id="2" name="">
             <a:extLst xmlns:a="http://schemas.openxmlformats.org/drawingml/2006/main">
               <a:ext uri="{FF2B5EF4-FFF2-40B4-BE49-F238E27FC236}">
-                <a16:creationId xmlns:a16="http://schemas.microsoft.com/office/drawing/2014/main" id="{4968A66C-3B83-45FA-B656-00F2F7BC044D}"/>
+                <a16:creationId xmlns:a16="http://schemas.microsoft.com/office/drawing/2014/main" id="{05C6E501-8CEE-41FF-9EA3-7C541307A959}"/>
               </a:ext>
             </a:extLst>
           </p:cNvPr>
@@ -11053,7 +11061,7 @@
           <p:cNvPr id="3" name="">
             <a:extLst xmlns:a="http://schemas.openxmlformats.org/drawingml/2006/main">
               <a:ext uri="{FF2B5EF4-FFF2-40B4-BE49-F238E27FC236}">
-                <a16:creationId xmlns:a16="http://schemas.microsoft.com/office/drawing/2014/main" id="{8AFC7995-F560-4C4E-A5F7-702E0025B814}"/>
+                <a16:creationId xmlns:a16="http://schemas.microsoft.com/office/drawing/2014/main" id="{19B6C0F9-F84F-430C-A29D-845967B40633}"/>
               </a:ext>
             </a:extLst>
           </p:cNvPr>
@@ -11085,7 +11093,7 @@
           <p:cNvPr id="4" name="">
             <a:extLst xmlns:a="http://schemas.openxmlformats.org/drawingml/2006/main">
               <a:ext uri="{FF2B5EF4-FFF2-40B4-BE49-F238E27FC236}">
-                <a16:creationId xmlns:a16="http://schemas.microsoft.com/office/drawing/2014/main" id="{DB5C7870-232B-4B05-911C-4BC5D68AF955}"/>
+                <a16:creationId xmlns:a16="http://schemas.microsoft.com/office/drawing/2014/main" id="{6C2651CF-9AC8-410F-8A9E-864C39B70FF0}"/>
               </a:ext>
             </a:extLst>
           </p:cNvPr>
@@ -11142,7 +11150,7 @@
           <p:cNvPr id="5" name="">
             <a:extLst xmlns:a="http://schemas.openxmlformats.org/drawingml/2006/main">
               <a:ext uri="{FF2B5EF4-FFF2-40B4-BE49-F238E27FC236}">
-                <a16:creationId xmlns:a16="http://schemas.microsoft.com/office/drawing/2014/main" id="{1A95FD89-4F0B-4832-9DE7-F491E1FB6E50}"/>
+                <a16:creationId xmlns:a16="http://schemas.microsoft.com/office/drawing/2014/main" id="{2CDB5F91-816B-400C-9B5E-B71B9A15C628}"/>
               </a:ext>
             </a:extLst>
           </p:cNvPr>
@@ -11199,7 +11207,7 @@
           <p:cNvPr id="6" name="">
             <a:extLst xmlns:a="http://schemas.openxmlformats.org/drawingml/2006/main">
               <a:ext uri="{FF2B5EF4-FFF2-40B4-BE49-F238E27FC236}">
-                <a16:creationId xmlns:a16="http://schemas.microsoft.com/office/drawing/2014/main" id="{92A7A1DC-4C78-4A62-8AC0-35CC67E6F36A}"/>
+                <a16:creationId xmlns:a16="http://schemas.microsoft.com/office/drawing/2014/main" id="{A4B3B36D-022A-4188-8148-C8936C15108E}"/>
               </a:ext>
             </a:extLst>
           </p:cNvPr>
@@ -11256,7 +11264,7 @@
           <p:cNvPr id="7" name="">
             <a:extLst xmlns:a="http://schemas.openxmlformats.org/drawingml/2006/main">
               <a:ext uri="{FF2B5EF4-FFF2-40B4-BE49-F238E27FC236}">
-                <a16:creationId xmlns:a16="http://schemas.microsoft.com/office/drawing/2014/main" id="{ACF7D2A9-931E-4776-AFB0-8EA085F36183}"/>
+                <a16:creationId xmlns:a16="http://schemas.microsoft.com/office/drawing/2014/main" id="{BDF43E86-51F4-48A4-9D82-F93060F3C03D}"/>
               </a:ext>
             </a:extLst>
           </p:cNvPr>
@@ -11288,7 +11296,7 @@
           <p:cNvPr id="8" name="">
             <a:extLst xmlns:a="http://schemas.openxmlformats.org/drawingml/2006/main">
               <a:ext uri="{FF2B5EF4-FFF2-40B4-BE49-F238E27FC236}">
-                <a16:creationId xmlns:a16="http://schemas.microsoft.com/office/drawing/2014/main" id="{18CBFDBE-C971-467E-BE84-BE270D1DCAD5}"/>
+                <a16:creationId xmlns:a16="http://schemas.microsoft.com/office/drawing/2014/main" id="{AEFB4107-5459-4A9C-AE18-8C5C282691DF}"/>
               </a:ext>
             </a:extLst>
           </p:cNvPr>
@@ -11345,7 +11353,7 @@
           <p:cNvPr id="9" name="">
             <a:extLst xmlns:a="http://schemas.openxmlformats.org/drawingml/2006/main">
               <a:ext uri="{FF2B5EF4-FFF2-40B4-BE49-F238E27FC236}">
-                <a16:creationId xmlns:a16="http://schemas.microsoft.com/office/drawing/2014/main" id="{DA6639F2-20C1-427F-B76A-B85341C9A0D5}"/>
+                <a16:creationId xmlns:a16="http://schemas.microsoft.com/office/drawing/2014/main" id="{E89C034F-3333-4BE3-A2EC-3C804C4EBF81}"/>
               </a:ext>
             </a:extLst>
           </p:cNvPr>
@@ -11406,7 +11414,7 @@
           <p:nvPr/>
         </p:nvPicPr>
         <p:blipFill>
-          <a:blip xmlns:r="http://schemas.openxmlformats.org/officeDocument/2006/relationships" xmlns:a="http://schemas.openxmlformats.org/drawingml/2006/main" r:embed="R07888caacaf24e8f"/>
+          <a:blip xmlns:r="http://schemas.openxmlformats.org/officeDocument/2006/relationships" xmlns:a="http://schemas.openxmlformats.org/drawingml/2006/main" r:embed="Rfba4adc2f6214900"/>
           <a:stretch xmlns:a="http://schemas.openxmlformats.org/drawingml/2006/main"/>
         </p:blipFill>
         <p:spPr>
@@ -11424,7 +11432,7 @@
           <p:cNvPr id="11" name="">
             <a:extLst xmlns:a="http://schemas.openxmlformats.org/drawingml/2006/main">
               <a:ext uri="{FF2B5EF4-FFF2-40B4-BE49-F238E27FC236}">
-                <a16:creationId xmlns:a16="http://schemas.microsoft.com/office/drawing/2014/main" id="{0639D71A-AAC3-4224-ABEE-A4DB5B00047A}"/>
+                <a16:creationId xmlns:a16="http://schemas.microsoft.com/office/drawing/2014/main" id="{64D9F4BC-F9B6-446F-A043-206E221291D8}"/>
               </a:ext>
             </a:extLst>
           </p:cNvPr>
@@ -11481,7 +11489,7 @@
           <p:cNvPr id="12" name="">
             <a:extLst xmlns:a="http://schemas.openxmlformats.org/drawingml/2006/main">
               <a:ext uri="{FF2B5EF4-FFF2-40B4-BE49-F238E27FC236}">
-                <a16:creationId xmlns:a16="http://schemas.microsoft.com/office/drawing/2014/main" id="{22A571FD-0CBC-4BFA-965F-131241BD23B9}"/>
+                <a16:creationId xmlns:a16="http://schemas.microsoft.com/office/drawing/2014/main" id="{0B79C7D6-645D-46FA-9935-95C3C72140EA}"/>
               </a:ext>
             </a:extLst>
           </p:cNvPr>
@@ -11538,7 +11546,7 @@
           <p:cNvPr id="13" name="">
             <a:extLst xmlns:a="http://schemas.openxmlformats.org/drawingml/2006/main">
               <a:ext uri="{FF2B5EF4-FFF2-40B4-BE49-F238E27FC236}">
-                <a16:creationId xmlns:a16="http://schemas.microsoft.com/office/drawing/2014/main" id="{BEED0FC9-6CF0-4F07-B274-91FA8AF0D57B}"/>
+                <a16:creationId xmlns:a16="http://schemas.microsoft.com/office/drawing/2014/main" id="{56676B50-A539-4416-86D9-57E7D5F9C0D8}"/>
               </a:ext>
             </a:extLst>
           </p:cNvPr>
@@ -11570,7 +11578,7 @@
           <p:cNvPr id="14" name="">
             <a:extLst xmlns:a="http://schemas.openxmlformats.org/drawingml/2006/main">
               <a:ext uri="{FF2B5EF4-FFF2-40B4-BE49-F238E27FC236}">
-                <a16:creationId xmlns:a16="http://schemas.microsoft.com/office/drawing/2014/main" id="{111E4F75-1B1F-4924-BE1C-A3CB4BC46B5B}"/>
+                <a16:creationId xmlns:a16="http://schemas.microsoft.com/office/drawing/2014/main" id="{ED7255E4-5FCA-4A1C-93E0-B12AEB07AEDF}"/>
               </a:ext>
             </a:extLst>
           </p:cNvPr>
@@ -11627,7 +11635,7 @@
           <p:cNvPr id="15" name="">
             <a:extLst xmlns:a="http://schemas.openxmlformats.org/drawingml/2006/main">
               <a:ext uri="{FF2B5EF4-FFF2-40B4-BE49-F238E27FC236}">
-                <a16:creationId xmlns:a16="http://schemas.microsoft.com/office/drawing/2014/main" id="{1977FFD5-2531-4D35-8F8E-334FEEF3C271}"/>
+                <a16:creationId xmlns:a16="http://schemas.microsoft.com/office/drawing/2014/main" id="{D74DC53F-F5EF-4841-9419-14BC0CEC2773}"/>
               </a:ext>
             </a:extLst>
           </p:cNvPr>
@@ -11682,7 +11690,7 @@
     </p:spTree>
     <p:extLst>
       <p:ext uri="{BB962C8B-B14F-4D97-AF65-F5344CB8AC3E}">
-        <p14:creationId xmlns:p14="http://schemas.microsoft.com/office/powerpoint/2010/main" val="795983548"/>
+        <p14:creationId xmlns:p14="http://schemas.microsoft.com/office/powerpoint/2010/main" val="767621367"/>
       </p:ext>
     </p:extLst>
   </p:cSld>
@@ -11837,7 +11845,7 @@
           <p:cNvPr id="23" name="">
             <a:extLst xmlns:a="http://schemas.openxmlformats.org/drawingml/2006/main">
               <a:ext uri="{FF2B5EF4-FFF2-40B4-BE49-F238E27FC236}">
-                <a16:creationId xmlns:a16="http://schemas.microsoft.com/office/drawing/2014/main" id="{770DBCEB-28C9-4D11-977B-959366670D73}"/>
+                <a16:creationId xmlns:a16="http://schemas.microsoft.com/office/drawing/2014/main" id="{36ADBDB5-935A-4F7D-96C1-8A695E054C49}"/>
               </a:ext>
             </a:extLst>
           </p:cNvPr>
@@ -11869,7 +11877,7 @@
           <p:cNvPr id="2" name="">
             <a:extLst xmlns:a="http://schemas.openxmlformats.org/drawingml/2006/main">
               <a:ext uri="{FF2B5EF4-FFF2-40B4-BE49-F238E27FC236}">
-                <a16:creationId xmlns:a16="http://schemas.microsoft.com/office/drawing/2014/main" id="{807E58F2-98F0-4086-BD39-6DE38E82B6F1}"/>
+                <a16:creationId xmlns:a16="http://schemas.microsoft.com/office/drawing/2014/main" id="{F6AAD591-B07C-4BED-83D4-D1BB7CA37EC5}"/>
               </a:ext>
             </a:extLst>
           </p:cNvPr>
@@ -11926,7 +11934,7 @@
           <p:cNvPr id="3" name="">
             <a:extLst xmlns:a="http://schemas.openxmlformats.org/drawingml/2006/main">
               <a:ext uri="{FF2B5EF4-FFF2-40B4-BE49-F238E27FC236}">
-                <a16:creationId xmlns:a16="http://schemas.microsoft.com/office/drawing/2014/main" id="{0F84CB55-5D2E-4D9B-8808-6AC7977070CD}"/>
+                <a16:creationId xmlns:a16="http://schemas.microsoft.com/office/drawing/2014/main" id="{CA54CE8B-4239-45B5-8C2B-2891AEE795A6}"/>
               </a:ext>
             </a:extLst>
           </p:cNvPr>
@@ -11958,7 +11966,7 @@
           <p:cNvPr id="4" name="">
             <a:extLst xmlns:a="http://schemas.openxmlformats.org/drawingml/2006/main">
               <a:ext uri="{FF2B5EF4-FFF2-40B4-BE49-F238E27FC236}">
-                <a16:creationId xmlns:a16="http://schemas.microsoft.com/office/drawing/2014/main" id="{B59CFEF5-3C9C-464E-A337-AFBDC404480A}"/>
+                <a16:creationId xmlns:a16="http://schemas.microsoft.com/office/drawing/2014/main" id="{B613BDB2-9930-4C38-A748-963D6373A518}"/>
               </a:ext>
             </a:extLst>
           </p:cNvPr>
@@ -12015,7 +12023,7 @@
           <p:cNvPr id="5" name="">
             <a:extLst xmlns:a="http://schemas.openxmlformats.org/drawingml/2006/main">
               <a:ext uri="{FF2B5EF4-FFF2-40B4-BE49-F238E27FC236}">
-                <a16:creationId xmlns:a16="http://schemas.microsoft.com/office/drawing/2014/main" id="{85B6BFB9-A881-4AFB-96BD-21DAB0D14AD1}"/>
+                <a16:creationId xmlns:a16="http://schemas.microsoft.com/office/drawing/2014/main" id="{0C8E6210-D8FA-41F7-BAAE-9AE2EE3F2404}"/>
               </a:ext>
             </a:extLst>
           </p:cNvPr>
@@ -12072,7 +12080,7 @@
           <p:cNvPr id="6" name="">
             <a:extLst xmlns:a="http://schemas.openxmlformats.org/drawingml/2006/main">
               <a:ext uri="{FF2B5EF4-FFF2-40B4-BE49-F238E27FC236}">
-                <a16:creationId xmlns:a16="http://schemas.microsoft.com/office/drawing/2014/main" id="{3A514FC8-0306-44E0-B05F-8B1DE2871411}"/>
+                <a16:creationId xmlns:a16="http://schemas.microsoft.com/office/drawing/2014/main" id="{678B82E8-2C7C-4975-93B8-C1492988D3C4}"/>
               </a:ext>
             </a:extLst>
           </p:cNvPr>
@@ -12129,7 +12137,7 @@
           <p:cNvPr id="7" name="">
             <a:extLst xmlns:a="http://schemas.openxmlformats.org/drawingml/2006/main">
               <a:ext uri="{FF2B5EF4-FFF2-40B4-BE49-F238E27FC236}">
-                <a16:creationId xmlns:a16="http://schemas.microsoft.com/office/drawing/2014/main" id="{C93C74A5-F0E4-4B62-80E0-F50382D556BB}"/>
+                <a16:creationId xmlns:a16="http://schemas.microsoft.com/office/drawing/2014/main" id="{43D19AFE-1681-48CF-A0E0-520FD8E117C7}"/>
               </a:ext>
             </a:extLst>
           </p:cNvPr>
@@ -12161,7 +12169,7 @@
           <p:cNvPr id="8" name="">
             <a:extLst xmlns:a="http://schemas.openxmlformats.org/drawingml/2006/main">
               <a:ext uri="{FF2B5EF4-FFF2-40B4-BE49-F238E27FC236}">
-                <a16:creationId xmlns:a16="http://schemas.microsoft.com/office/drawing/2014/main" id="{E1D57807-D719-4162-9DBB-EA9CAB3BC0F9}"/>
+                <a16:creationId xmlns:a16="http://schemas.microsoft.com/office/drawing/2014/main" id="{3D3FCF17-86E8-4003-8E65-0CC740FD7E13}"/>
               </a:ext>
             </a:extLst>
           </p:cNvPr>
@@ -12218,7 +12226,7 @@
           <p:cNvPr id="9" name="">
             <a:extLst xmlns:a="http://schemas.openxmlformats.org/drawingml/2006/main">
               <a:ext uri="{FF2B5EF4-FFF2-40B4-BE49-F238E27FC236}">
-                <a16:creationId xmlns:a16="http://schemas.microsoft.com/office/drawing/2014/main" id="{71122D96-1402-4A2E-89E0-42EE4A11E9EA}"/>
+                <a16:creationId xmlns:a16="http://schemas.microsoft.com/office/drawing/2014/main" id="{8BEADB40-9918-4F71-B32A-95D1EC4BE7EC}"/>
               </a:ext>
             </a:extLst>
           </p:cNvPr>
@@ -12275,7 +12283,7 @@
           <p:cNvPr id="10" name="">
             <a:extLst xmlns:a="http://schemas.openxmlformats.org/drawingml/2006/main">
               <a:ext uri="{FF2B5EF4-FFF2-40B4-BE49-F238E27FC236}">
-                <a16:creationId xmlns:a16="http://schemas.microsoft.com/office/drawing/2014/main" id="{7DB3FEDC-9346-4F26-8DB7-D3196D472C19}"/>
+                <a16:creationId xmlns:a16="http://schemas.microsoft.com/office/drawing/2014/main" id="{BB6D4F03-67CB-453D-AD1E-BA422BDD66E6}"/>
               </a:ext>
             </a:extLst>
           </p:cNvPr>
@@ -12309,7 +12317,7 @@
           <p:cNvPr id="11" name="">
             <a:extLst xmlns:a="http://schemas.openxmlformats.org/drawingml/2006/main">
               <a:ext uri="{FF2B5EF4-FFF2-40B4-BE49-F238E27FC236}">
-                <a16:creationId xmlns:a16="http://schemas.microsoft.com/office/drawing/2014/main" id="{B5E12D9E-0B32-4EEB-861A-78DC0CDA8D29}"/>
+                <a16:creationId xmlns:a16="http://schemas.microsoft.com/office/drawing/2014/main" id="{056DF45D-929C-4DD7-BF18-7047AA6651F3}"/>
               </a:ext>
             </a:extLst>
           </p:cNvPr>
@@ -12341,7 +12349,7 @@
           <p:cNvPr id="12" name="">
             <a:extLst xmlns:a="http://schemas.openxmlformats.org/drawingml/2006/main">
               <a:ext uri="{FF2B5EF4-FFF2-40B4-BE49-F238E27FC236}">
-                <a16:creationId xmlns:a16="http://schemas.microsoft.com/office/drawing/2014/main" id="{1F4863CD-50D7-48BC-AE0C-282B7A0B6C4E}"/>
+                <a16:creationId xmlns:a16="http://schemas.microsoft.com/office/drawing/2014/main" id="{666EAC49-DA78-4913-98F9-F3307EB045A6}"/>
               </a:ext>
             </a:extLst>
           </p:cNvPr>
@@ -12398,7 +12406,7 @@
           <p:cNvPr id="13" name="">
             <a:extLst xmlns:a="http://schemas.openxmlformats.org/drawingml/2006/main">
               <a:ext uri="{FF2B5EF4-FFF2-40B4-BE49-F238E27FC236}">
-                <a16:creationId xmlns:a16="http://schemas.microsoft.com/office/drawing/2014/main" id="{641E2C0A-54BD-4599-83B9-900F2A6CAECF}"/>
+                <a16:creationId xmlns:a16="http://schemas.microsoft.com/office/drawing/2014/main" id="{A496DCD0-DBEB-4855-BC7D-A3E855EDAC81}"/>
               </a:ext>
             </a:extLst>
           </p:cNvPr>
@@ -12455,7 +12463,7 @@
           <p:cNvPr id="14" name="">
             <a:extLst xmlns:a="http://schemas.openxmlformats.org/drawingml/2006/main">
               <a:ext uri="{FF2B5EF4-FFF2-40B4-BE49-F238E27FC236}">
-                <a16:creationId xmlns:a16="http://schemas.microsoft.com/office/drawing/2014/main" id="{EEC040EF-DC68-4AFA-8C52-1989FC88DE65}"/>
+                <a16:creationId xmlns:a16="http://schemas.microsoft.com/office/drawing/2014/main" id="{71DA98CA-B6F3-423B-B3B8-F4C3C0DBBA5B}"/>
               </a:ext>
             </a:extLst>
           </p:cNvPr>
@@ -12489,7 +12497,7 @@
           <p:cNvPr id="15" name="">
             <a:extLst xmlns:a="http://schemas.openxmlformats.org/drawingml/2006/main">
               <a:ext uri="{FF2B5EF4-FFF2-40B4-BE49-F238E27FC236}">
-                <a16:creationId xmlns:a16="http://schemas.microsoft.com/office/drawing/2014/main" id="{08A781AD-C485-4F6D-9E12-4C2FCDBADE8D}"/>
+                <a16:creationId xmlns:a16="http://schemas.microsoft.com/office/drawing/2014/main" id="{55601773-B1AB-41BE-8850-902FD94B0B3C}"/>
               </a:ext>
             </a:extLst>
           </p:cNvPr>
@@ -12521,7 +12529,7 @@
           <p:cNvPr id="16" name="">
             <a:extLst xmlns:a="http://schemas.openxmlformats.org/drawingml/2006/main">
               <a:ext uri="{FF2B5EF4-FFF2-40B4-BE49-F238E27FC236}">
-                <a16:creationId xmlns:a16="http://schemas.microsoft.com/office/drawing/2014/main" id="{B09921D7-DEA1-49C8-B0E6-7A2AA42CBE72}"/>
+                <a16:creationId xmlns:a16="http://schemas.microsoft.com/office/drawing/2014/main" id="{E229D4FB-3429-4810-A916-EE33F9DC5547}"/>
               </a:ext>
             </a:extLst>
           </p:cNvPr>
@@ -12578,7 +12586,7 @@
           <p:cNvPr id="17" name="">
             <a:extLst xmlns:a="http://schemas.openxmlformats.org/drawingml/2006/main">
               <a:ext uri="{FF2B5EF4-FFF2-40B4-BE49-F238E27FC236}">
-                <a16:creationId xmlns:a16="http://schemas.microsoft.com/office/drawing/2014/main" id="{D4E023D5-3040-401B-B02C-B6C1A9E75FF3}"/>
+                <a16:creationId xmlns:a16="http://schemas.microsoft.com/office/drawing/2014/main" id="{92CEF3AE-EE8B-4446-8F3E-24B10654408B}"/>
               </a:ext>
             </a:extLst>
           </p:cNvPr>
@@ -12635,7 +12643,7 @@
           <p:cNvPr id="18" name="">
             <a:extLst xmlns:a="http://schemas.openxmlformats.org/drawingml/2006/main">
               <a:ext uri="{FF2B5EF4-FFF2-40B4-BE49-F238E27FC236}">
-                <a16:creationId xmlns:a16="http://schemas.microsoft.com/office/drawing/2014/main" id="{1AC65535-C8E9-45DD-A55A-E6E45C45B497}"/>
+                <a16:creationId xmlns:a16="http://schemas.microsoft.com/office/drawing/2014/main" id="{8B44EA92-BAFE-4A7C-A4F3-E4D0ECBE4EA0}"/>
               </a:ext>
             </a:extLst>
           </p:cNvPr>
@@ -12669,7 +12677,7 @@
           <p:cNvPr id="19" name="">
             <a:extLst xmlns:a="http://schemas.openxmlformats.org/drawingml/2006/main">
               <a:ext uri="{FF2B5EF4-FFF2-40B4-BE49-F238E27FC236}">
-                <a16:creationId xmlns:a16="http://schemas.microsoft.com/office/drawing/2014/main" id="{7C691C5B-A108-4D64-9435-AA55E19EF04D}"/>
+                <a16:creationId xmlns:a16="http://schemas.microsoft.com/office/drawing/2014/main" id="{A73B92E2-EEC0-4E6A-A379-598E5BDE519B}"/>
               </a:ext>
             </a:extLst>
           </p:cNvPr>
@@ -12701,7 +12709,7 @@
           <p:cNvPr id="20" name="">
             <a:extLst xmlns:a="http://schemas.openxmlformats.org/drawingml/2006/main">
               <a:ext uri="{FF2B5EF4-FFF2-40B4-BE49-F238E27FC236}">
-                <a16:creationId xmlns:a16="http://schemas.microsoft.com/office/drawing/2014/main" id="{D35550F0-2397-4267-8D0B-78970D16FF91}"/>
+                <a16:creationId xmlns:a16="http://schemas.microsoft.com/office/drawing/2014/main" id="{E9213365-BBEC-4143-ADB1-C12E1577F89D}"/>
               </a:ext>
             </a:extLst>
           </p:cNvPr>
@@ -12758,7 +12766,7 @@
           <p:cNvPr id="21" name="">
             <a:extLst xmlns:a="http://schemas.openxmlformats.org/drawingml/2006/main">
               <a:ext uri="{FF2B5EF4-FFF2-40B4-BE49-F238E27FC236}">
-                <a16:creationId xmlns:a16="http://schemas.microsoft.com/office/drawing/2014/main" id="{67F10DDE-B10F-4C61-9361-09E6A5D4B2DC}"/>
+                <a16:creationId xmlns:a16="http://schemas.microsoft.com/office/drawing/2014/main" id="{8B1062E9-AD9C-4842-B118-14039260B05F}"/>
               </a:ext>
             </a:extLst>
           </p:cNvPr>
@@ -12815,7 +12823,7 @@
           <p:cNvPr id="22" name="">
             <a:extLst xmlns:a="http://schemas.openxmlformats.org/drawingml/2006/main">
               <a:ext uri="{FF2B5EF4-FFF2-40B4-BE49-F238E27FC236}">
-                <a16:creationId xmlns:a16="http://schemas.microsoft.com/office/drawing/2014/main" id="{3B45896B-CF50-478A-969A-54E8F6D8B0FE}"/>
+                <a16:creationId xmlns:a16="http://schemas.microsoft.com/office/drawing/2014/main" id="{15CDB5DA-66E9-4368-8A9B-EBBDAA84321C}"/>
               </a:ext>
             </a:extLst>
           </p:cNvPr>
@@ -12870,7 +12878,7 @@
     </p:spTree>
     <p:extLst>
       <p:ext uri="{BB962C8B-B14F-4D97-AF65-F5344CB8AC3E}">
-        <p14:creationId xmlns:p14="http://schemas.microsoft.com/office/powerpoint/2010/main" val="1701049147"/>
+        <p14:creationId xmlns:p14="http://schemas.microsoft.com/office/powerpoint/2010/main" val="572820869"/>
       </p:ext>
     </p:extLst>
   </p:cSld>
@@ -13071,7 +13079,7 @@
           <p:cNvPr id="22" name="">
             <a:extLst xmlns:a="http://schemas.openxmlformats.org/drawingml/2006/main">
               <a:ext uri="{FF2B5EF4-FFF2-40B4-BE49-F238E27FC236}">
-                <a16:creationId xmlns:a16="http://schemas.microsoft.com/office/drawing/2014/main" id="{BAF940C4-1F64-4440-97CA-C5618F999177}"/>
+                <a16:creationId xmlns:a16="http://schemas.microsoft.com/office/drawing/2014/main" id="{D0219294-AF29-46C9-8769-4DAD3D50C8A7}"/>
               </a:ext>
             </a:extLst>
           </p:cNvPr>
@@ -13103,7 +13111,7 @@
           <p:cNvPr id="2" name="">
             <a:extLst xmlns:a="http://schemas.openxmlformats.org/drawingml/2006/main">
               <a:ext uri="{FF2B5EF4-FFF2-40B4-BE49-F238E27FC236}">
-                <a16:creationId xmlns:a16="http://schemas.microsoft.com/office/drawing/2014/main" id="{B65145C0-4C48-4572-905E-814121A3DE5B}"/>
+                <a16:creationId xmlns:a16="http://schemas.microsoft.com/office/drawing/2014/main" id="{311F44E6-6D0F-41F5-8D58-A03F9463E8A0}"/>
               </a:ext>
             </a:extLst>
           </p:cNvPr>
@@ -13160,7 +13168,7 @@
           <p:cNvPr id="3" name="">
             <a:extLst xmlns:a="http://schemas.openxmlformats.org/drawingml/2006/main">
               <a:ext uri="{FF2B5EF4-FFF2-40B4-BE49-F238E27FC236}">
-                <a16:creationId xmlns:a16="http://schemas.microsoft.com/office/drawing/2014/main" id="{BA254CA7-A63B-4E47-AEE6-8301CE0958E7}"/>
+                <a16:creationId xmlns:a16="http://schemas.microsoft.com/office/drawing/2014/main" id="{697F4034-63EE-42FA-8B18-C796586B42BC}"/>
               </a:ext>
             </a:extLst>
           </p:cNvPr>
@@ -13192,7 +13200,7 @@
           <p:cNvPr id="4" name="">
             <a:extLst xmlns:a="http://schemas.openxmlformats.org/drawingml/2006/main">
               <a:ext uri="{FF2B5EF4-FFF2-40B4-BE49-F238E27FC236}">
-                <a16:creationId xmlns:a16="http://schemas.microsoft.com/office/drawing/2014/main" id="{2F148EDA-5A09-44FB-B3C8-B8057232805B}"/>
+                <a16:creationId xmlns:a16="http://schemas.microsoft.com/office/drawing/2014/main" id="{7FF07B49-6AE6-49EA-9CBC-99AF02CC7AE6}"/>
               </a:ext>
             </a:extLst>
           </p:cNvPr>
@@ -13249,7 +13257,7 @@
           <p:cNvPr id="5" name="">
             <a:extLst xmlns:a="http://schemas.openxmlformats.org/drawingml/2006/main">
               <a:ext uri="{FF2B5EF4-FFF2-40B4-BE49-F238E27FC236}">
-                <a16:creationId xmlns:a16="http://schemas.microsoft.com/office/drawing/2014/main" id="{A6600C0C-181C-4391-9916-F051241C7DD4}"/>
+                <a16:creationId xmlns:a16="http://schemas.microsoft.com/office/drawing/2014/main" id="{7A6DA5BE-E5F3-4FAB-9687-6D3B417592A8}"/>
               </a:ext>
             </a:extLst>
           </p:cNvPr>
@@ -13306,7 +13314,7 @@
           <p:cNvPr id="6" name="">
             <a:extLst xmlns:a="http://schemas.openxmlformats.org/drawingml/2006/main">
               <a:ext uri="{FF2B5EF4-FFF2-40B4-BE49-F238E27FC236}">
-                <a16:creationId xmlns:a16="http://schemas.microsoft.com/office/drawing/2014/main" id="{2E07A34C-9F08-49DD-9591-D84B1FEAFAD5}"/>
+                <a16:creationId xmlns:a16="http://schemas.microsoft.com/office/drawing/2014/main" id="{CCDD53F2-2039-45EE-8548-18E56D9F8690}"/>
               </a:ext>
             </a:extLst>
           </p:cNvPr>
@@ -13363,7 +13371,7 @@
           <p:cNvPr id="7" name="">
             <a:extLst xmlns:a="http://schemas.openxmlformats.org/drawingml/2006/main">
               <a:ext uri="{FF2B5EF4-FFF2-40B4-BE49-F238E27FC236}">
-                <a16:creationId xmlns:a16="http://schemas.microsoft.com/office/drawing/2014/main" id="{AF4A1CC7-1E96-4830-B9E0-A77D43BB0D9F}"/>
+                <a16:creationId xmlns:a16="http://schemas.microsoft.com/office/drawing/2014/main" id="{FDDCCD2D-F72E-4E7E-B6F8-D7C5CEC6C0AF}"/>
               </a:ext>
             </a:extLst>
           </p:cNvPr>
@@ -13395,7 +13403,7 @@
           <p:cNvPr id="8" name="">
             <a:extLst xmlns:a="http://schemas.openxmlformats.org/drawingml/2006/main">
               <a:ext uri="{FF2B5EF4-FFF2-40B4-BE49-F238E27FC236}">
-                <a16:creationId xmlns:a16="http://schemas.microsoft.com/office/drawing/2014/main" id="{9992FCDF-7438-40C9-B113-C00AA617D36B}"/>
+                <a16:creationId xmlns:a16="http://schemas.microsoft.com/office/drawing/2014/main" id="{D8A48AA0-E3E1-4739-9B35-E170D59DAA24}"/>
               </a:ext>
             </a:extLst>
           </p:cNvPr>
@@ -13452,7 +13460,7 @@
           <p:cNvPr id="9" name="">
             <a:extLst xmlns:a="http://schemas.openxmlformats.org/drawingml/2006/main">
               <a:ext uri="{FF2B5EF4-FFF2-40B4-BE49-F238E27FC236}">
-                <a16:creationId xmlns:a16="http://schemas.microsoft.com/office/drawing/2014/main" id="{A1F6854D-25B9-45B9-9F77-31E3E200F82D}"/>
+                <a16:creationId xmlns:a16="http://schemas.microsoft.com/office/drawing/2014/main" id="{E0CAB7EF-095F-4F29-AC96-C75A2A307894}"/>
               </a:ext>
             </a:extLst>
           </p:cNvPr>
@@ -13509,7 +13517,7 @@
           <p:cNvPr id="10" name="">
             <a:extLst xmlns:a="http://schemas.openxmlformats.org/drawingml/2006/main">
               <a:ext uri="{FF2B5EF4-FFF2-40B4-BE49-F238E27FC236}">
-                <a16:creationId xmlns:a16="http://schemas.microsoft.com/office/drawing/2014/main" id="{5A5F01F7-1DD3-4E14-96CA-4E49DD45CBDC}"/>
+                <a16:creationId xmlns:a16="http://schemas.microsoft.com/office/drawing/2014/main" id="{456BEFFA-B87F-402A-98AA-E038F42EAFED}"/>
               </a:ext>
             </a:extLst>
           </p:cNvPr>
@@ -13543,7 +13551,7 @@
           <p:cNvPr id="11" name="">
             <a:extLst xmlns:a="http://schemas.openxmlformats.org/drawingml/2006/main">
               <a:ext uri="{FF2B5EF4-FFF2-40B4-BE49-F238E27FC236}">
-                <a16:creationId xmlns:a16="http://schemas.microsoft.com/office/drawing/2014/main" id="{14CCFC12-D0DB-4855-9203-DA99E1EF7CDC}"/>
+                <a16:creationId xmlns:a16="http://schemas.microsoft.com/office/drawing/2014/main" id="{48A207B7-FFEE-4BD1-BE8F-F4EBFB5787B3}"/>
               </a:ext>
             </a:extLst>
           </p:cNvPr>
@@ -13575,7 +13583,7 @@
           <p:cNvPr id="12" name="">
             <a:extLst xmlns:a="http://schemas.openxmlformats.org/drawingml/2006/main">
               <a:ext uri="{FF2B5EF4-FFF2-40B4-BE49-F238E27FC236}">
-                <a16:creationId xmlns:a16="http://schemas.microsoft.com/office/drawing/2014/main" id="{B4954FDC-EB0A-4CEF-ABBA-8B115B44E6A3}"/>
+                <a16:creationId xmlns:a16="http://schemas.microsoft.com/office/drawing/2014/main" id="{B38B392F-1759-45C0-B52B-AF452560CCA4}"/>
               </a:ext>
             </a:extLst>
           </p:cNvPr>
@@ -13632,7 +13640,7 @@
           <p:cNvPr id="13" name="">
             <a:extLst xmlns:a="http://schemas.openxmlformats.org/drawingml/2006/main">
               <a:ext uri="{FF2B5EF4-FFF2-40B4-BE49-F238E27FC236}">
-                <a16:creationId xmlns:a16="http://schemas.microsoft.com/office/drawing/2014/main" id="{8BBE3740-31BF-42CC-9820-798C8F20716D}"/>
+                <a16:creationId xmlns:a16="http://schemas.microsoft.com/office/drawing/2014/main" id="{43753A09-151E-43EF-857E-09AD132D4913}"/>
               </a:ext>
             </a:extLst>
           </p:cNvPr>
@@ -13689,7 +13697,7 @@
           <p:cNvPr id="14" name="">
             <a:extLst xmlns:a="http://schemas.openxmlformats.org/drawingml/2006/main">
               <a:ext uri="{FF2B5EF4-FFF2-40B4-BE49-F238E27FC236}">
-                <a16:creationId xmlns:a16="http://schemas.microsoft.com/office/drawing/2014/main" id="{915585E3-E0BB-4BD5-B1B4-2E1CBD9E5B94}"/>
+                <a16:creationId xmlns:a16="http://schemas.microsoft.com/office/drawing/2014/main" id="{68E0C9BF-E14F-4708-BC4E-B9C4B6027D37}"/>
               </a:ext>
             </a:extLst>
           </p:cNvPr>
@@ -13723,7 +13731,7 @@
           <p:cNvPr id="15" name="">
             <a:extLst xmlns:a="http://schemas.openxmlformats.org/drawingml/2006/main">
               <a:ext uri="{FF2B5EF4-FFF2-40B4-BE49-F238E27FC236}">
-                <a16:creationId xmlns:a16="http://schemas.microsoft.com/office/drawing/2014/main" id="{E3A5FD10-EB9D-4360-A0BC-6A43CB8B3B79}"/>
+                <a16:creationId xmlns:a16="http://schemas.microsoft.com/office/drawing/2014/main" id="{2C73C70F-0BDA-4CAD-AD95-3BCBE32B7D8E}"/>
               </a:ext>
             </a:extLst>
           </p:cNvPr>
@@ -13755,7 +13763,7 @@
           <p:cNvPr id="16" name="">
             <a:extLst xmlns:a="http://schemas.openxmlformats.org/drawingml/2006/main">
               <a:ext uri="{FF2B5EF4-FFF2-40B4-BE49-F238E27FC236}">
-                <a16:creationId xmlns:a16="http://schemas.microsoft.com/office/drawing/2014/main" id="{06DCEF02-3EE4-4163-8E35-14F136126CEB}"/>
+                <a16:creationId xmlns:a16="http://schemas.microsoft.com/office/drawing/2014/main" id="{E96CA93B-EDA0-4722-9C44-E5ED4D2B5707}"/>
               </a:ext>
             </a:extLst>
           </p:cNvPr>
@@ -13812,7 +13820,7 @@
           <p:cNvPr id="17" name="">
             <a:extLst xmlns:a="http://schemas.openxmlformats.org/drawingml/2006/main">
               <a:ext uri="{FF2B5EF4-FFF2-40B4-BE49-F238E27FC236}">
-                <a16:creationId xmlns:a16="http://schemas.microsoft.com/office/drawing/2014/main" id="{28EC7FED-8F71-40BB-8C45-AB0AB42D351A}"/>
+                <a16:creationId xmlns:a16="http://schemas.microsoft.com/office/drawing/2014/main" id="{5FAF50F6-F347-447E-AC8F-A7411FC52304}"/>
               </a:ext>
             </a:extLst>
           </p:cNvPr>
@@ -13869,7 +13877,7 @@
           <p:cNvPr id="18" name="">
             <a:extLst xmlns:a="http://schemas.openxmlformats.org/drawingml/2006/main">
               <a:ext uri="{FF2B5EF4-FFF2-40B4-BE49-F238E27FC236}">
-                <a16:creationId xmlns:a16="http://schemas.microsoft.com/office/drawing/2014/main" id="{81BFBC0C-0F4B-4F3F-B995-EFCA4CF082DC}"/>
+                <a16:creationId xmlns:a16="http://schemas.microsoft.com/office/drawing/2014/main" id="{AB6AE836-9897-47C8-8803-44D56740653C}"/>
               </a:ext>
             </a:extLst>
           </p:cNvPr>
@@ -13903,7 +13911,7 @@
           <p:cNvPr id="19" name="">
             <a:extLst xmlns:a="http://schemas.openxmlformats.org/drawingml/2006/main">
               <a:ext uri="{FF2B5EF4-FFF2-40B4-BE49-F238E27FC236}">
-                <a16:creationId xmlns:a16="http://schemas.microsoft.com/office/drawing/2014/main" id="{442AA9AE-4005-4CC6-A546-2C30ED5603F7}"/>
+                <a16:creationId xmlns:a16="http://schemas.microsoft.com/office/drawing/2014/main" id="{09663AB3-F912-478E-A94E-4CFF62AEFE05}"/>
               </a:ext>
             </a:extLst>
           </p:cNvPr>
@@ -13935,7 +13943,7 @@
           <p:cNvPr id="20" name="">
             <a:extLst xmlns:a="http://schemas.openxmlformats.org/drawingml/2006/main">
               <a:ext uri="{FF2B5EF4-FFF2-40B4-BE49-F238E27FC236}">
-                <a16:creationId xmlns:a16="http://schemas.microsoft.com/office/drawing/2014/main" id="{93C6D94C-038C-4CCD-9268-96259DCAF035}"/>
+                <a16:creationId xmlns:a16="http://schemas.microsoft.com/office/drawing/2014/main" id="{6F78AF0F-69C5-47BD-A323-9756FBDC27A7}"/>
               </a:ext>
             </a:extLst>
           </p:cNvPr>
@@ -13992,7 +14000,7 @@
           <p:cNvPr id="21" name="">
             <a:extLst xmlns:a="http://schemas.openxmlformats.org/drawingml/2006/main">
               <a:ext uri="{FF2B5EF4-FFF2-40B4-BE49-F238E27FC236}">
-                <a16:creationId xmlns:a16="http://schemas.microsoft.com/office/drawing/2014/main" id="{87AFECB9-38FD-480A-BE47-002A418752E4}"/>
+                <a16:creationId xmlns:a16="http://schemas.microsoft.com/office/drawing/2014/main" id="{5DBD9B28-CE05-4F77-8B1F-ED6765EEAE99}"/>
               </a:ext>
             </a:extLst>
           </p:cNvPr>
@@ -14047,7 +14055,7 @@
     </p:spTree>
     <p:extLst>
       <p:ext uri="{BB962C8B-B14F-4D97-AF65-F5344CB8AC3E}">
-        <p14:creationId xmlns:p14="http://schemas.microsoft.com/office/powerpoint/2010/main" val="1271488259"/>
+        <p14:creationId xmlns:p14="http://schemas.microsoft.com/office/powerpoint/2010/main" val="1640667355"/>
       </p:ext>
     </p:extLst>
   </p:cSld>
